--- a/1_Presentacion/AI_Shark_Tank_Tigo_Predice.pptx
+++ b/1_Presentacion/AI_Shark_Tank_Tigo_Predice.pptx
@@ -118,36 +118,36 @@
   <p:extLst>
     <p:ext uri="{521415D9-36F7-43E2-AB2F-B90AF26B5E84}">
       <p14:sectionLst xmlns:p14="http://schemas.microsoft.com/office/powerpoint/2010/main">
-        <p14:section name="Apertura" id="{7c88a43e-e87a-9c05-b0a5-42fc3fb58a79}">
+        <p14:section name="Apertura" id="{9387e7c2-42ae-aa85-0833-44387f05279a}">
           <p14:sldIdLst>
             <p14:sldId id="256"/>
             <p14:sldId id="257"/>
           </p14:sldIdLst>
         </p14:section>
-        <p14:section name="Problema" id="{b2b5c825-1750-083e-2b19-afb27cf4a64e}">
+        <p14:section name="Problema" id="{4b3469aa-16cd-ffae-ed0a-e0dcaa06bb73}">
           <p14:sldIdLst>
             <p14:sldId id="258"/>
           </p14:sldIdLst>
         </p14:section>
-        <p14:section name="Usuario" id="{c541335e-52e9-88fc-b6d0-a55019e72378}">
+        <p14:section name="Usuario" id="{e3731ee4-965c-b500-c984-56de705091da}">
           <p14:sldIdLst>
             <p14:sldId id="259"/>
           </p14:sldIdLst>
         </p14:section>
-        <p14:section name="Idea con IA" id="{5d1929d9-677b-acb9-3421-1843e63571d6}">
+        <p14:section name="Idea con IA" id="{5a783f06-7100-2d2b-77f4-2fcf3326a1ff}">
           <p14:sldIdLst>
             <p14:sldId id="260"/>
             <p14:sldId id="261"/>
             <p14:sldId id="262"/>
           </p14:sldIdLst>
         </p14:section>
-        <p14:section name="Impacto" id="{02c9dabf-84ad-c9b8-6955-58a0e7302c7c}">
+        <p14:section name="Impacto" id="{773483de-94f3-5298-7ce5-da7fbc710a05}">
           <p14:sldIdLst>
             <p14:sldId id="263"/>
             <p14:sldId id="264"/>
           </p14:sldIdLst>
         </p14:section>
-        <p14:section name="Pedido" id="{015c2cdc-49a1-8f3e-2ac7-661aee4c8ef1}">
+        <p14:section name="Pedido" id="{7357d3fd-7f95-f14c-68c6-8e31e9d673ad}">
           <p14:sldIdLst>
             <p14:sldId id="265"/>
             <p14:sldId id="266"/>
@@ -189,7 +189,7 @@
                 </a:solidFill>
                 <a:latin typeface="+mn-lt"/>
               </a:rPr>
-              <a:t>% de visitas evitables anticipadas (2 % marcado por semana)</a:t>
+              <a:t>% de visitas evitables anticipadas (simulado)</a:t>
             </a:r>
           </a:p>
         </c:rich>
@@ -552,13 +552,13 @@
                 <c:formatCode>General</c:formatCode>
                 <c:ptCount val="3"/>
                 <c:pt idx="0">
-                  <c:v>1.5</c:v>
+                  <c:v>-0.6</c:v>
                 </c:pt>
                 <c:pt idx="1">
-                  <c:v>5.4</c:v>
+                  <c:v>1.3</c:v>
                 </c:pt>
                 <c:pt idx="2">
-                  <c:v>10</c:v>
+                  <c:v>3.4</c:v>
                 </c:pt>
               </c:numCache>
             </c:numRef>
@@ -635,13 +635,13 @@
                 <c:formatCode>General</c:formatCode>
                 <c:ptCount val="3"/>
                 <c:pt idx="0">
-                  <c:v>-1.5</c:v>
+                  <c:v>-2.3</c:v>
                 </c:pt>
                 <c:pt idx="1">
-                  <c:v>5.1</c:v>
+                  <c:v>3</c:v>
                 </c:pt>
                 <c:pt idx="2">
-                  <c:v>15</c:v>
+                  <c:v>10.8</c:v>
                 </c:pt>
               </c:numCache>
             </c:numRef>
@@ -1647,7 +1647,7 @@
           <a:p>
             <a:r>
               <a:rPr lang="en-US" dirty="0"/>
-              <a:t>Contar la historia: un hogar empieza a tener problemas de WiFi. El módem lo reporta, pero nadie lo mira hasta que cruza un umbral. El cliente llama, esperamos, mandamos un técnico, y en 3 de cada 10 visitas no hay nada físico que arreglar. Decir con naturalidad que las cifras son supuestos a validar con Tigo.</a:t>
+              <a:t>Contar la historia: un hogar empieza a tener problemas de WiFi. El módem lo reporta, pero nadie lo mira hasta que cruza un umbral. El cliente llama, esperamos, mandamos un técnico, y en 1 de cada 4 visitas no hay nada físico que arreglar. Tigo tiene 191 mil hogares, según el 20-F 2025 de Millicom. Decir con naturalidad que las cifras son supuestos a validar con Tigo.</a:t>
             </a:r>
             <a:endParaRPr lang="en-US" dirty="0"/>
           </a:p>
@@ -1999,7 +1999,7 @@
           <a:p>
             <a:r>
               <a:rPr lang="en-US" dirty="0"/>
-              <a:t>No medimos la IA contra nada: la medimos contra lo que Tigo ya tiene, la alarma por umbral. Mismo presupuesto, el doble de visitas anticipadas. Y si con datos reales no gana, usamos la regla: el piloto igual sirve.</a:t>
+              <a:t>No medimos la IA contra nada: la medimos contra lo que Tigo ya tiene, la alarma por umbral. En datos simulados, con el mismo presupuesto, anticipa el doble. Decirlo claro: es una hipótesis que validamos con datos reales en dos semanas. Y si con datos reales no gana, usamos la regla: el piloto igual sirve.</a:t>
             </a:r>
             <a:endParaRPr lang="en-US" dirty="0"/>
           </a:p>
@@ -2087,7 +2087,7 @@
           <a:p>
             <a:r>
               <a:rPr lang="en-US" dirty="0"/>
-              <a:t>Solo contamos beneficio duro: visitas y llamadas evitadas por su costo. L 10 M netos en el año 1 en el escenario base. Cada frente se paga con apenas 9 % de reducción. La retención y el NPS son upside, no están en el número.</a:t>
+              <a:t>Solo contamos beneficio duro: visitas y llamadas evitadas por su costo. L 4.3 M netos en el año 1 en el escenario base. Usamos la base real de Tigo Honduras y costos hondureños: visita L 650, llamada L 65. Móvil se paga con 12 % menos llamadas y Hogar con 22 % menos visitas evitables. La retención y el NPS son upside, no están en el número.</a:t>
             </a:r>
             <a:endParaRPr lang="en-US" dirty="0"/>
           </a:p>
@@ -2175,7 +2175,7 @@
           <a:p>
             <a:r>
               <a:rPr lang="en-US" dirty="0"/>
-              <a:t>Rango completo: −L 23 mil a L 25 M. Incluso con todos los supuestos en su valor bajo, queda en equilibrio. El piloto se mide contra un grupo control, con intervalo de confianza: así la decisión se toma con datos de Tigo, no con nuestra simulación.</a:t>
+              <a:t>Rango completo: −L 3 M a L 14 M. Si todos los supuestos salen mal a la vez, escalar perdería hasta L 3 M. Por eso no pedimos escalar: pedimos un piloto de L 770 mil que lo averigua. El piloto se mide contra un grupo control, con intervalo de confianza: así la decisión se toma con datos de Tigo, no con nuestra simulación.</a:t>
             </a:r>
             <a:endParaRPr lang="en-US" dirty="0"/>
           </a:p>
@@ -2578,7 +2578,7 @@
                   <a:srgbClr val="9FB2F0"/>
                 </a:solidFill>
               </a:rPr>
-              <a:t>Tigo Predice · Datos simulados: supuestos a validar con Tigo</a:t>
+              <a:t>Tigo Predice · Clientes: Millicom 20-F 2025 · Costos y efectos: supuestos a validar con Tigo</a:t>
             </a:r>
             <a:endParaRPr lang="en-US" sz="1000" dirty="0"/>
           </a:p>
@@ -4058,7 +4058,7 @@
                   <a:srgbClr val="334155"/>
                 </a:solidFill>
               </a:rPr>
-              <a:t>las visitas bajan 15 % o más (llamadas 10 % en Móvil), con significancia</a:t>
+              <a:t>las visitas bajan 15 % o más (llamadas 12 % en Móvil), con significancia</a:t>
             </a:r>
             <a:endParaRPr lang="en-US" sz="1400" dirty="0"/>
           </a:p>
@@ -5054,7 +5054,7 @@
                   <a:srgbClr val="0B1F5C"/>
                 </a:solidFill>
               </a:rPr>
-              <a:t>Si es GO, el escenario base deja L 10 M netos en el año 1 a nivel nacional.</a:t>
+              <a:t>Si es GO, el escenario base deja L 4.3 M netos en el año 1 a nivel nacional.</a:t>
             </a:r>
             <a:endParaRPr lang="en-US" sz="1500" dirty="0"/>
           </a:p>
@@ -7334,7 +7334,7 @@
                   <a:srgbClr val="0A22B8"/>
                 </a:solidFill>
               </a:rPr>
-              <a:t>7,500</a:t>
+              <a:t>5,700</a:t>
             </a:r>
             <a:endParaRPr lang="en-US" sz="3400" dirty="0"/>
           </a:p>
@@ -7370,7 +7370,7 @@
                   <a:srgbClr val="5B6575"/>
                 </a:solidFill>
               </a:rPr>
-              <a:t>visitas técnicas a hogares cada mes</a:t>
+              <a:t>visitas técnicas al mes en 191,000 hogares (estimado)</a:t>
             </a:r>
             <a:endParaRPr lang="en-US" sz="1400" dirty="0"/>
           </a:p>
@@ -7440,7 +7440,7 @@
                   <a:srgbClr val="F25C54"/>
                 </a:solidFill>
               </a:rPr>
-              <a:t>3 de cada 10</a:t>
+              <a:t>1 de cada 4</a:t>
             </a:r>
             <a:endParaRPr lang="en-US" sz="3400" dirty="0"/>
           </a:p>
@@ -7476,7 +7476,7 @@
                   <a:srgbClr val="5B6575"/>
                 </a:solidFill>
               </a:rPr>
-              <a:t>no encuentran falla física: se podían resolver a distancia</a:t>
+              <a:t>visitas se podían evitar (la industria: 17–20 % «sin falla»)</a:t>
             </a:r>
             <a:endParaRPr lang="en-US" sz="1400" dirty="0"/>
           </a:p>
@@ -7546,7 +7546,7 @@
                   <a:srgbClr val="0A22B8"/>
                 </a:solidFill>
               </a:rPr>
-              <a:t>L 1,100</a:t>
+              <a:t>L 650</a:t>
             </a:r>
             <a:endParaRPr lang="en-US" sz="3400" dirty="0"/>
           </a:p>
@@ -7922,7 +7922,7 @@
                   <a:srgbClr val="334155"/>
                 </a:solidFill>
               </a:rPr>
-              <a:t>Pierde el servicio, llama, espera y debe quedarse en casa para el técnico. 175,000 hogares (supuesto).</a:t>
+              <a:t>Pierde el servicio, llama, espera y debe quedarse en casa para el técnico. 191,000 hogares de Tigo (Millicom, 2025).</a:t>
             </a:r>
             <a:endParaRPr lang="en-US" sz="1600" dirty="0"/>
           </a:p>
@@ -8051,7 +8051,7 @@
                   <a:srgbClr val="334155"/>
                 </a:solidFill>
               </a:rPr>
-              <a:t>No sabe qué pasa ni cuándo vuelve el servicio: 1 de cada 3 afectados llama si no recibe aviso.</a:t>
+              <a:t>5.0 M de clientes. En una falla masiva no sabe qué pasa: sin aviso, 1 de cada 3 afectados llama.</a:t>
             </a:r>
             <a:endParaRPr lang="en-US" sz="1600" dirty="0"/>
           </a:p>
@@ -8309,7 +8309,7 @@
                   <a:srgbClr val="334155"/>
                 </a:solidFill>
               </a:rPr>
-              <a:t>3 de cada 10 visitas son a hogares sin falla física: tiempo que no llega a quien sí lo necesita.</a:t>
+              <a:t>1 de cada 4 visitas es a un hogar sin falla física: tiempo que no llega a quien sí lo necesita.</a:t>
             </a:r>
             <a:endParaRPr lang="en-US" sz="1600" dirty="0"/>
           </a:p>
@@ -8387,7 +8387,7 @@
                   <a:srgbClr val="FFFFFF"/>
                 </a:solidFill>
               </a:rPr>
-              <a:t>L 1,100 por visita, L 85 por llamada y un cliente que recuerda que tuvo que llamar (NPS).</a:t>
+              <a:t>L 650 por visita, L 65 por llamada y un cliente que recuerda que tuvo que llamar (NPS).</a:t>
             </a:r>
             <a:endParaRPr lang="en-US" sz="1700" dirty="0"/>
           </a:p>
@@ -10245,7 +10245,7 @@
                   <a:srgbClr val="C9D5FB"/>
                 </a:solidFill>
               </a:rPr>
-              <a:t>L 1,270 de ahorro por L 0.31</a:t>
+              <a:t>L 780 de ahorro por L 0.31</a:t>
             </a:r>
             <a:endParaRPr lang="en-US" sz="1600" dirty="0"/>
           </a:p>
@@ -10456,7 +10456,7 @@
                   <a:schemeClr val="bg1"/>
                 </a:solidFill>
               </a:rPr>
-              <a:t>Con el mismo presupuesto, anticipa el doble que las alarmas</a:t>
+              <a:t>En la simulación, anticipa el doble que las alarmas de hoy</a:t>
             </a:r>
             <a:endParaRPr lang="en-US" sz="3000" dirty="0"/>
           </a:p>
@@ -10750,7 +10750,7 @@
                   <a:srgbClr val="FFFFFF"/>
                 </a:solidFill>
               </a:rPr>
-              <a:t>Con salida honesta</a:t>
+              <a:t>Hipótesis, no promesa</a:t>
             </a:r>
             <a:endParaRPr lang="en-US" sz="1600" dirty="0"/>
           </a:p>
@@ -10767,7 +10767,7 @@
                   <a:srgbClr val="C9D5FB"/>
                 </a:solidFill>
               </a:rPr>
-              <a:t>Si con datos reales no supera a la regla por 1.3×, el piloto usa la regla. No hay pérdida.</a:t>
+              <a:t>Se valida con 3 meses de telemetría real en las semanas 0–2. Si no supera a la regla por 1.3×, se usa la regla.</a:t>
             </a:r>
             <a:endParaRPr lang="en-US" sz="1600" dirty="0"/>
           </a:p>
@@ -10978,7 +10978,7 @@
                   <a:schemeClr val="bg1"/>
                 </a:solidFill>
               </a:rPr>
-              <a:t>L 10 M netos en el año 1, contando solo ahorro duro</a:t>
+              <a:t>L 4.3 M netos el año 1, con costos reales de Honduras</a:t>
             </a:r>
             <a:endParaRPr lang="en-US" sz="3000" dirty="0"/>
           </a:p>
@@ -11048,7 +11048,7 @@
                   <a:srgbClr val="0B1F5C"/>
                 </a:solidFill>
               </a:rPr>
-              <a:t>L 10 M</a:t>
+              <a:t>L 4.3 M</a:t>
             </a:r>
             <a:endParaRPr lang="en-US" sz="4000" dirty="0"/>
           </a:p>
@@ -11154,7 +11154,7 @@
                   <a:srgbClr val="0A22B8"/>
                 </a:solidFill>
               </a:rPr>
-              <a:t>5,200</a:t>
+              <a:t>3,300</a:t>
             </a:r>
             <a:endParaRPr lang="en-US" sz="4000" dirty="0"/>
           </a:p>
@@ -11260,7 +11260,7 @@
                   <a:srgbClr val="0A22B8"/>
                 </a:solidFill>
               </a:rPr>
-              <a:t>120,000</a:t>
+              <a:t>116,600</a:t>
             </a:r>
             <a:endParaRPr lang="en-US" sz="4000" dirty="0"/>
           </a:p>
@@ -11366,7 +11366,7 @@
                   <a:srgbClr val="0A22B8"/>
                 </a:solidFill>
               </a:rPr>
-              <a:t>9 %</a:t>
+              <a:t>12 %</a:t>
             </a:r>
             <a:endParaRPr lang="en-US" sz="4000" dirty="0"/>
           </a:p>
@@ -11402,7 +11402,7 @@
                   <a:srgbClr val="5B6575"/>
                 </a:solidFill>
               </a:rPr>
-              <a:t>de reducción basta para que cada frente se pague</a:t>
+              <a:t>menos llamadas y Móvil se paga en el año 1 (Hogar: 22 %)</a:t>
             </a:r>
             <a:endParaRPr lang="en-US" sz="1400" dirty="0"/>
           </a:p>
@@ -11874,7 +11874,7 @@
                   <a:schemeClr val="bg1"/>
                 </a:solidFill>
               </a:rPr>
-              <a:t>En el peor escenario queda en equilibrio; en el base deja L 10 M</a:t>
+              <a:t>Si todo sale mal se pierden L 3 M: por eso, primero un piloto</a:t>
             </a:r>
             <a:endParaRPr lang="en-US" sz="3000" dirty="0"/>
           </a:p>

--- a/1_Presentacion/AI_Shark_Tank_Tigo_Predice.pptx
+++ b/1_Presentacion/AI_Shark_Tank_Tigo_Predice.pptx
@@ -118,36 +118,36 @@
   <p:extLst>
     <p:ext uri="{521415D9-36F7-43E2-AB2F-B90AF26B5E84}">
       <p14:sectionLst xmlns:p14="http://schemas.microsoft.com/office/powerpoint/2010/main">
-        <p14:section name="Apertura" id="{9387e7c2-42ae-aa85-0833-44387f05279a}">
+        <p14:section name="Apertura" id="{207302ec-50a4-c7d4-a9da-1972d08d6b59}">
           <p14:sldIdLst>
             <p14:sldId id="256"/>
             <p14:sldId id="257"/>
           </p14:sldIdLst>
         </p14:section>
-        <p14:section name="Problema" id="{4b3469aa-16cd-ffae-ed0a-e0dcaa06bb73}">
+        <p14:section name="Problema" id="{afb81607-ed2a-8123-190b-cd1249023d28}">
           <p14:sldIdLst>
             <p14:sldId id="258"/>
           </p14:sldIdLst>
         </p14:section>
-        <p14:section name="Usuario" id="{e3731ee4-965c-b500-c984-56de705091da}">
+        <p14:section name="Usuario" id="{209b7aee-9314-9962-b38a-10f8574ee6fa}">
           <p14:sldIdLst>
             <p14:sldId id="259"/>
           </p14:sldIdLst>
         </p14:section>
-        <p14:section name="Idea con IA" id="{5a783f06-7100-2d2b-77f4-2fcf3326a1ff}">
+        <p14:section name="Idea con IA" id="{9e75d2d5-7bec-6484-a5c1-ffa6db4fc551}">
           <p14:sldIdLst>
             <p14:sldId id="260"/>
             <p14:sldId id="261"/>
             <p14:sldId id="262"/>
           </p14:sldIdLst>
         </p14:section>
-        <p14:section name="Impacto" id="{773483de-94f3-5298-7ce5-da7fbc710a05}">
+        <p14:section name="Impacto" id="{91f61e90-3987-988f-8623-becb0cdeca86}">
           <p14:sldIdLst>
             <p14:sldId id="263"/>
             <p14:sldId id="264"/>
           </p14:sldIdLst>
         </p14:section>
-        <p14:section name="Pedido" id="{7357d3fd-7f95-f14c-68c6-8e31e9d673ad}">
+        <p14:section name="Pedido" id="{eaaa90c5-af29-7aca-e0f6-7649ce1301b2}">
           <p14:sldIdLst>
             <p14:sldId id="265"/>
             <p14:sldId id="266"/>
@@ -1207,7 +1207,7 @@
           <a:p>
             <a:r>
               <a:rPr lang="en-US" dirty="0"/>
-              <a:t>Saludo breve y una sola frase: 'En los próximos minutos les muestro cómo evitar la llamada y la visita del técnico antes de que el cliente note la falla.' (Completar los nombres del equipo antes de enviar.)</a:t>
+              <a:t>Saludo breve y una sola frase: 'En los próximos minutos les muestro cómo evitar la llamada y la visita del técnico antes de que el cliente note la falla.'</a:t>
             </a:r>
             <a:endParaRPr lang="en-US" dirty="0"/>
           </a:p>
@@ -3349,7 +3349,7 @@
                   <a:srgbClr val="FFFFFF"/>
                 </a:solidFill>
               </a:rPr>
-              <a:t>Integrantes: </a:t>
+              <a:t>Presenta: </a:t>
             </a:r>
             <a:pPr indent="0" marL="0">
               <a:buNone/>
@@ -3357,10 +3357,10 @@
             <a:r>
               <a:rPr lang="en-US" sz="1800" dirty="0">
                 <a:solidFill>
-                  <a:srgbClr val="FFC629"/>
-                </a:solidFill>
-              </a:rPr>
-              <a:t>[Nombre 1] · [Nombre 2] · [Nombre 3]</a:t>
+                  <a:srgbClr val="FFFFFF"/>
+                </a:solidFill>
+              </a:rPr>
+              <a:t>Sandra Jimenez · Asistente de Experiencia B2B</a:t>
             </a:r>
             <a:endParaRPr lang="en-US" sz="1800" dirty="0"/>
           </a:p>
@@ -5258,10 +5258,10 @@
             <a:r>
               <a:rPr lang="en-US" sz="1800" dirty="0">
                 <a:solidFill>
-                  <a:srgbClr val="FFC629"/>
-                </a:solidFill>
-              </a:rPr>
-              <a:t>[Nombre 1] · [Nombre 2] · [Nombre 3]</a:t>
+                  <a:srgbClr val="FFFFFF"/>
+                </a:solidFill>
+              </a:rPr>
+              <a:t>Sandra Jimenez · sandra.jimenez@tigo.com.hn</a:t>
             </a:r>
             <a:endParaRPr lang="en-US" sz="1800" dirty="0"/>
           </a:p>

--- a/1_Presentacion/AI_Shark_Tank_Tigo_Predice.pptx
+++ b/1_Presentacion/AI_Shark_Tank_Tigo_Predice.pptx
@@ -17,9 +17,10 @@
     <p:sldId id="265" r:id="rId11"/>
     <p:sldId id="266" r:id="rId12"/>
     <p:sldId id="267" r:id="rId13"/>
+    <p:sldId id="268" r:id="rId14"/>
   </p:sldIdLst>
   <p:notesMasterIdLst>
-    <p:notesMasterId r:id="rId14"/>
+    <p:notesMasterId r:id="rId15"/>
   </p:notesMasterIdLst>
   <p:sldSz cx="12192000" cy="6858000"/>
   <p:notesSz cx="6858000" cy="12192000"/>
@@ -118,40 +119,41 @@
   <p:extLst>
     <p:ext uri="{521415D9-36F7-43E2-AB2F-B90AF26B5E84}">
       <p14:sectionLst xmlns:p14="http://schemas.microsoft.com/office/powerpoint/2010/main">
-        <p14:section name="Apertura" id="{207302ec-50a4-c7d4-a9da-1972d08d6b59}">
+        <p14:section name="Apertura" id="{4ab726f2-76e4-8c0d-3991-1ee6aac9a756}">
           <p14:sldIdLst>
             <p14:sldId id="256"/>
             <p14:sldId id="257"/>
           </p14:sldIdLst>
         </p14:section>
-        <p14:section name="Problema" id="{afb81607-ed2a-8123-190b-cd1249023d28}">
+        <p14:section name="Problema" id="{00ede3ee-83ed-20b3-1261-f2276823b396}">
           <p14:sldIdLst>
             <p14:sldId id="258"/>
           </p14:sldIdLst>
         </p14:section>
-        <p14:section name="Usuario" id="{209b7aee-9314-9962-b38a-10f8574ee6fa}">
+        <p14:section name="Usuario" id="{8d6428ac-c953-8cd9-8e5b-ba186347d2a7}">
           <p14:sldIdLst>
             <p14:sldId id="259"/>
           </p14:sldIdLst>
         </p14:section>
-        <p14:section name="Idea con IA" id="{9e75d2d5-7bec-6484-a5c1-ffa6db4fc551}">
+        <p14:section name="Idea con IA" id="{cd0da47e-0ece-310a-1d57-1b235871fba9}">
           <p14:sldIdLst>
             <p14:sldId id="260"/>
             <p14:sldId id="261"/>
             <p14:sldId id="262"/>
           </p14:sldIdLst>
         </p14:section>
-        <p14:section name="Impacto" id="{91f61e90-3987-988f-8623-becb0cdeca86}">
+        <p14:section name="Impacto" id="{972b3387-2353-3350-971c-4341b71e3ac9}">
           <p14:sldIdLst>
             <p14:sldId id="263"/>
             <p14:sldId id="264"/>
+            <p14:sldId id="265"/>
           </p14:sldIdLst>
         </p14:section>
-        <p14:section name="Pedido" id="{eaaa90c5-af29-7aca-e0f6-7649ce1301b2}">
+        <p14:section name="Pedido" id="{e689bbf6-f6f9-c762-4c74-1bc033111ddc}">
           <p14:sldIdLst>
-            <p14:sldId id="265"/>
             <p14:sldId id="266"/>
             <p14:sldId id="267"/>
+            <p14:sldId id="268"/>
           </p14:sldIdLst>
         </p14:section>
       </p14:sectionLst>
@@ -1295,7 +1297,7 @@
           <a:p>
             <a:r>
               <a:rPr lang="en-US" dirty="0"/>
-              <a:t>El riesgo está acotado: 12 semanas, una ciudad y criterios de éxito definidos antes de empezar. Si no funciona, se detiene. Honduras aún no tiene una ley integral de datos personales, así que usamos GDPR como vara.</a:t>
+              <a:t>Esto ya no es solo una buena idea: desde marzo de 2026 CONATEL exige avisar las interrupciones y compensar automáticamente las horas sin servicio con un registro de duración y zonas. Tigo Predice automatiza las dos cosas, y además protege lo que Millicom prioriza este año: servicio, eficiencia y flujo de caja.</a:t>
             </a:r>
             <a:endParaRPr lang="en-US" dirty="0"/>
           </a:p>
@@ -1383,7 +1385,7 @@
           <a:p>
             <a:r>
               <a:rPr lang="en-US" dirty="0"/>
-              <a:t>Pedir con claridad: L 770 mil, 12 semanas, datos y un equipo pequeño. Ustedes deciden en la semana 12 con datos reales.</a:t>
+              <a:t>El riesgo está acotado: 12 semanas, una ciudad y criterios de éxito definidos antes de empezar. Si no funciona, se detiene. Honduras aún no tiene una ley integral de datos personales, así que usamos GDPR como referencia.</a:t>
             </a:r>
             <a:endParaRPr lang="en-US" dirty="0"/>
           </a:p>
@@ -1471,7 +1473,7 @@
           <a:p>
             <a:r>
               <a:rPr lang="en-US" dirty="0"/>
-              <a:t>Pausa. Bajar el ritmo para la frase final. Luego: 'Gracias. ¿Preguntas?' (El documento de preguntas frecuentes del jurado tiene las respuestas preparadas.)</a:t>
+              <a:t>Pedir con claridad: L 770 mil, 12 semanas, datos y un equipo pequeño. Ustedes deciden en la semana 12 con datos reales.</a:t>
             </a:r>
             <a:endParaRPr lang="en-US" dirty="0"/>
           </a:p>
@@ -1495,6 +1497,94 @@
             <a:fld id="{F7021451-1387-4CA6-816F-3879F97B5CBC}" type="slidenum">
               <a:rPr lang="en-US"/>
               <a:t>12</a:t>
+            </a:fld>
+            <a:endParaRPr lang="en-US"/>
+          </a:p>
+        </p:txBody>
+      </p:sp>
+    </p:spTree>
+    <p:extLst>
+      <p:ext uri="{BB962C8B-B14F-4D97-AF65-F5344CB8AC3E}">
+        <p14:creationId xmlns:p14="http://schemas.microsoft.com/office/powerpoint/2010/main" val="1024086991"/>
+      </p:ext>
+    </p:extLst>
+  </p:cSld>
+  <p:clrMapOvr>
+    <a:masterClrMapping/>
+  </p:clrMapOvr>
+</p:notes>
+</file>
+
+<file path=ppt/notesSlides/notesSlide13.xml><?xml version="1.0" encoding="utf-8"?>
+<p:notes xmlns:a="http://schemas.openxmlformats.org/drawingml/2006/main" xmlns:r="http://schemas.openxmlformats.org/officeDocument/2006/relationships" xmlns:p="http://schemas.openxmlformats.org/presentationml/2006/main">
+  <p:cSld>
+    <p:spTree>
+      <p:nvGrpSpPr>
+        <p:cNvPr id="1" name=""/>
+        <p:cNvGrpSpPr/>
+        <p:nvPr/>
+      </p:nvGrpSpPr>
+      <p:grpSpPr>
+        <a:xfrm>
+          <a:off x="0" y="0"/>
+          <a:ext cx="0" cy="0"/>
+          <a:chOff x="0" y="0"/>
+          <a:chExt cx="0" cy="0"/>
+        </a:xfrm>
+      </p:grpSpPr>
+      <p:sp>
+        <p:nvSpPr>
+          <p:cNvPr id="2" name="Slide Image Placeholder 1"/>
+          <p:cNvSpPr>
+            <a:spLocks noGrp="1" noRot="1" noChangeAspect="1"/>
+          </p:cNvSpPr>
+          <p:nvPr>
+            <p:ph type="sldImg"/>
+          </p:nvPr>
+        </p:nvSpPr>
+        <p:spPr/>
+      </p:sp>
+      <p:sp>
+        <p:nvSpPr>
+          <p:cNvPr id="3" name="Notes Placeholder 2"/>
+          <p:cNvSpPr>
+            <a:spLocks noGrp="1"/>
+          </p:cNvSpPr>
+          <p:nvPr>
+            <p:ph type="body" idx="1"/>
+          </p:nvPr>
+        </p:nvSpPr>
+        <p:spPr/>
+        <p:txBody>
+          <a:bodyPr/>
+          <a:lstStyle/>
+          <a:p>
+            <a:r>
+              <a:rPr lang="en-US" dirty="0"/>
+              <a:t>Pausa. Bajar el ritmo para la frase final. Luego: 'Gracias. ¿Preguntas?' (El documento de preguntas frecuentes del jurado tiene las respuestas preparadas.)</a:t>
+            </a:r>
+            <a:endParaRPr lang="en-US" dirty="0"/>
+          </a:p>
+        </p:txBody>
+      </p:sp>
+      <p:sp>
+        <p:nvSpPr>
+          <p:cNvPr id="4" name="Slide Number Placeholder 3"/>
+          <p:cNvSpPr>
+            <a:spLocks noGrp="1"/>
+          </p:cNvSpPr>
+          <p:nvPr>
+            <p:ph type="sldNum" sz="quarter" idx="10"/>
+          </p:nvPr>
+        </p:nvSpPr>
+        <p:spPr/>
+        <p:txBody>
+          <a:bodyPr/>
+          <a:lstStyle/>
+          <a:p>
+            <a:fld id="{F7021451-1387-4CA6-816F-3879F97B5CBC}" type="slidenum">
+              <a:rPr lang="en-US"/>
+              <a:t>13</a:t>
             </a:fld>
             <a:endParaRPr lang="en-US"/>
           </a:p>
@@ -1647,7 +1737,7 @@
           <a:p>
             <a:r>
               <a:rPr lang="en-US" dirty="0"/>
-              <a:t>Contar la historia: un hogar empieza a tener problemas de WiFi. El módem lo reporta, pero nadie lo mira hasta que cruza un umbral. El cliente llama, esperamos, mandamos un técnico, y en 1 de cada 4 visitas no hay nada físico que arreglar. Tigo tiene 191 mil hogares, según el 20-F 2025 de Millicom. Decir con naturalidad que las cifras son supuestos a validar con Tigo.</a:t>
+              <a:t>Contar la historia: un hogar empieza a tener problemas de WiFi. El módem lo reporta, y hoy esa señal se revisa cuando cruza un umbral. El cliente llama, esperamos, mandamos un técnico, y en 1 de cada 4 visitas no hay nada físico que arreglar. Tigo tiene 191 mil hogares, según el 20-F 2025 de Millicom. Decir con naturalidad que las cifras son supuestos a validar con Tigo.</a:t>
             </a:r>
             <a:endParaRPr lang="en-US" dirty="0"/>
           </a:p>
@@ -3450,7 +3540,7 @@
                   <a:srgbClr val="0B1F5C"/>
                 </a:solidFill>
               </a:rPr>
-              <a:t>Plan</a:t>
+              <a:t>Por qué ahora</a:t>
             </a:r>
             <a:endParaRPr lang="en-US" sz="2400" dirty="0"/>
           </a:p>
@@ -3488,7 +3578,7 @@
                   <a:srgbClr val="4CC9F0"/>
                 </a:solidFill>
               </a:rPr>
-              <a:t>¿Cómo lo hacemos realidad?</a:t>
+              <a:t>Estrategia de Millicom 2026 y regulación vigente</a:t>
             </a:r>
             <a:endParaRPr lang="en-US" sz="1700" dirty="0"/>
           </a:p>
@@ -3526,7 +3616,7 @@
                   <a:schemeClr val="bg1"/>
                 </a:solidFill>
               </a:rPr>
-              <a:t>Piloto de 12 semanas en San Pedro Sula, con GO / NO-GO medible</a:t>
+              <a:t>Lo pide la estrategia de Tigo y ya lo exige CONATEL</a:t>
             </a:r>
             <a:endParaRPr lang="en-US" sz="3000" dirty="0"/>
           </a:p>
@@ -3534,459 +3624,18 @@
       </p:sp>
       <p:sp>
         <p:nvSpPr>
-          <p:cNvPr id="6" name="f0"/>
+          <p:cNvPr id="6" name="millicom"/>
           <p:cNvSpPr/>
           <p:nvPr/>
         </p:nvSpPr>
         <p:spPr>
           <a:xfrm>
-            <a:off x="548640" y="2487168"/>
-            <a:ext cx="603504" cy="603504"/>
-          </a:xfrm>
-          <a:prstGeom prst="ellipse">
-            <a:avLst/>
-          </a:prstGeom>
-          <a:solidFill>
-            <a:srgbClr val="4CC9F0"/>
-          </a:solidFill>
-          <a:ln w="12700">
-            <a:solidFill>
-              <a:srgbClr val="4CC9F0"/>
-            </a:solidFill>
-            <a:prstDash val="solid"/>
-          </a:ln>
-        </p:spPr>
-      </p:sp>
-      <p:sp>
-        <p:nvSpPr>
-          <p:cNvPr id="7" name="f0-t"/>
-          <p:cNvSpPr txBox="1"/>
-          <p:nvPr/>
-        </p:nvSpPr>
-        <p:spPr>
-          <a:xfrm>
-            <a:off x="548640" y="2487168"/>
-            <a:ext cx="603504" cy="603504"/>
-          </a:xfrm>
-          <a:prstGeom prst="rect">
-            <a:avLst/>
-          </a:prstGeom>
-          <a:noFill/>
-          <a:ln/>
-        </p:spPr>
-        <p:txBody>
-          <a:bodyPr wrap="square" lIns="0" tIns="0" rIns="0" bIns="0" rtlCol="0" anchor="ctr"/>
-          <a:lstStyle/>
-          <a:p>
-            <a:pPr algn="ctr" indent="0" marL="0">
-              <a:buNone/>
-            </a:pPr>
-            <a:r>
-              <a:rPr lang="en-US" sz="2000" b="1" dirty="0">
-                <a:solidFill>
-                  <a:srgbClr val="0B1F5C"/>
-                </a:solidFill>
-              </a:rPr>
-              <a:t>1</a:t>
-            </a:r>
-            <a:endParaRPr lang="en-US" sz="2000" dirty="0"/>
-          </a:p>
-        </p:txBody>
-      </p:sp>
-      <p:sp>
-        <p:nvSpPr>
-          <p:cNvPr id="8" name="ft0"/>
-          <p:cNvSpPr txBox="1"/>
-          <p:nvPr/>
-        </p:nvSpPr>
-        <p:spPr>
-          <a:xfrm>
-            <a:off x="1298448" y="2450592"/>
-            <a:ext cx="2743200" cy="685800"/>
-          </a:xfrm>
-          <a:prstGeom prst="rect">
-            <a:avLst/>
-          </a:prstGeom>
-          <a:noFill/>
-          <a:ln/>
-        </p:spPr>
-        <p:txBody>
-          <a:bodyPr wrap="square" lIns="0" tIns="0" rIns="0" bIns="0" rtlCol="0" anchor="ctr"/>
-          <a:lstStyle/>
-          <a:p>
-            <a:pPr indent="0" marL="0">
-              <a:buNone/>
-            </a:pPr>
-            <a:r>
-              <a:rPr lang="en-US" sz="1300" dirty="0">
-                <a:solidFill>
-                  <a:srgbClr val="C9D5FB"/>
-                </a:solidFill>
-              </a:rPr>
-              <a:t>Semanas 0–2</a:t>
-            </a:r>
-            <a:endParaRPr lang="en-US" sz="1600" dirty="0"/>
-          </a:p>
-          <a:p>
-            <a:pPr indent="0" marL="0">
-              <a:buNone/>
-            </a:pPr>
-            <a:r>
-              <a:rPr lang="en-US" sz="2000" b="1" dirty="0">
-                <a:solidFill>
-                  <a:srgbClr val="FFFFFF"/>
-                </a:solidFill>
-              </a:rPr>
-              <a:t>Preparación</a:t>
-            </a:r>
-            <a:endParaRPr lang="en-US" sz="1600" dirty="0"/>
-          </a:p>
-        </p:txBody>
-      </p:sp>
-      <p:sp>
-        <p:nvSpPr>
-          <p:cNvPr id="9" name="fd0"/>
-          <p:cNvSpPr txBox="1"/>
-          <p:nvPr/>
-        </p:nvSpPr>
-        <p:spPr>
-          <a:xfrm>
-            <a:off x="548640" y="3246120"/>
-            <a:ext cx="3474720" cy="1005840"/>
-          </a:xfrm>
-          <a:prstGeom prst="rect">
-            <a:avLst/>
-          </a:prstGeom>
-          <a:noFill/>
-          <a:ln/>
-        </p:spPr>
-        <p:txBody>
-          <a:bodyPr wrap="square" lIns="0" tIns="0" rIns="0" bIns="0" rtlCol="0" anchor="t"/>
-          <a:lstStyle/>
-          <a:p>
-            <a:pPr indent="0" marL="0">
-              <a:buNone/>
-            </a:pPr>
-            <a:r>
-              <a:rPr lang="en-US" sz="1400" dirty="0">
-                <a:solidFill>
-                  <a:srgbClr val="C9D5FB"/>
-                </a:solidFill>
-              </a:rPr>
-              <a:t>Datos del ACS, NOC, CRM, call center y campo por archivo diario. Prueba retrospectiva IA vs. regla.</a:t>
-            </a:r>
-            <a:endParaRPr lang="en-US" sz="1400" dirty="0"/>
-          </a:p>
-        </p:txBody>
-      </p:sp>
-      <p:sp>
-        <p:nvSpPr>
-          <p:cNvPr id="10" name="f1"/>
-          <p:cNvSpPr/>
-          <p:nvPr/>
-        </p:nvSpPr>
-        <p:spPr>
-          <a:xfrm>
-            <a:off x="4279392" y="2487168"/>
-            <a:ext cx="603504" cy="603504"/>
-          </a:xfrm>
-          <a:prstGeom prst="ellipse">
-            <a:avLst/>
-          </a:prstGeom>
-          <a:solidFill>
-            <a:srgbClr val="4CC9F0"/>
-          </a:solidFill>
-          <a:ln w="12700">
-            <a:solidFill>
-              <a:srgbClr val="4CC9F0"/>
-            </a:solidFill>
-            <a:prstDash val="solid"/>
-          </a:ln>
-        </p:spPr>
-      </p:sp>
-      <p:sp>
-        <p:nvSpPr>
-          <p:cNvPr id="11" name="f1-t"/>
-          <p:cNvSpPr txBox="1"/>
-          <p:nvPr/>
-        </p:nvSpPr>
-        <p:spPr>
-          <a:xfrm>
-            <a:off x="4279392" y="2487168"/>
-            <a:ext cx="603504" cy="603504"/>
-          </a:xfrm>
-          <a:prstGeom prst="rect">
-            <a:avLst/>
-          </a:prstGeom>
-          <a:noFill/>
-          <a:ln/>
-        </p:spPr>
-        <p:txBody>
-          <a:bodyPr wrap="square" lIns="0" tIns="0" rIns="0" bIns="0" rtlCol="0" anchor="ctr"/>
-          <a:lstStyle/>
-          <a:p>
-            <a:pPr algn="ctr" indent="0" marL="0">
-              <a:buNone/>
-            </a:pPr>
-            <a:r>
-              <a:rPr lang="en-US" sz="2000" b="1" dirty="0">
-                <a:solidFill>
-                  <a:srgbClr val="0B1F5C"/>
-                </a:solidFill>
-              </a:rPr>
-              <a:t>2</a:t>
-            </a:r>
-            <a:endParaRPr lang="en-US" sz="2000" dirty="0"/>
-          </a:p>
-        </p:txBody>
-      </p:sp>
-      <p:sp>
-        <p:nvSpPr>
-          <p:cNvPr id="12" name="ft1"/>
-          <p:cNvSpPr txBox="1"/>
-          <p:nvPr/>
-        </p:nvSpPr>
-        <p:spPr>
-          <a:xfrm>
-            <a:off x="5029200" y="2450592"/>
-            <a:ext cx="2743200" cy="685800"/>
-          </a:xfrm>
-          <a:prstGeom prst="rect">
-            <a:avLst/>
-          </a:prstGeom>
-          <a:noFill/>
-          <a:ln/>
-        </p:spPr>
-        <p:txBody>
-          <a:bodyPr wrap="square" lIns="0" tIns="0" rIns="0" bIns="0" rtlCol="0" anchor="ctr"/>
-          <a:lstStyle/>
-          <a:p>
-            <a:pPr indent="0" marL="0">
-              <a:buNone/>
-            </a:pPr>
-            <a:r>
-              <a:rPr lang="en-US" sz="1300" dirty="0">
-                <a:solidFill>
-                  <a:srgbClr val="C9D5FB"/>
-                </a:solidFill>
-              </a:rPr>
-              <a:t>Semanas 3–10</a:t>
-            </a:r>
-            <a:endParaRPr lang="en-US" sz="1600" dirty="0"/>
-          </a:p>
-          <a:p>
-            <a:pPr indent="0" marL="0">
-              <a:buNone/>
-            </a:pPr>
-            <a:r>
-              <a:rPr lang="en-US" sz="2000" b="1" dirty="0">
-                <a:solidFill>
-                  <a:srgbClr val="FFFFFF"/>
-                </a:solidFill>
-              </a:rPr>
-              <a:t>Piloto en vivo</a:t>
-            </a:r>
-            <a:endParaRPr lang="en-US" sz="1600" dirty="0"/>
-          </a:p>
-        </p:txBody>
-      </p:sp>
-      <p:sp>
-        <p:nvSpPr>
-          <p:cNvPr id="13" name="fd1"/>
-          <p:cNvSpPr txBox="1"/>
-          <p:nvPr/>
-        </p:nvSpPr>
-        <p:spPr>
-          <a:xfrm>
-            <a:off x="4279392" y="3246120"/>
-            <a:ext cx="3474720" cy="1005840"/>
-          </a:xfrm>
-          <a:prstGeom prst="rect">
-            <a:avLst/>
-          </a:prstGeom>
-          <a:noFill/>
-          <a:ln/>
-        </p:spPr>
-        <p:txBody>
-          <a:bodyPr wrap="square" lIns="0" tIns="0" rIns="0" bIns="0" rtlCol="0" anchor="t"/>
-          <a:lstStyle/>
-          <a:p>
-            <a:pPr indent="0" marL="0">
-              <a:buNone/>
-            </a:pPr>
-            <a:r>
-              <a:rPr lang="en-US" sz="1400" dirty="0">
-                <a:solidFill>
-                  <a:srgbClr val="C9D5FB"/>
-                </a:solidFill>
-              </a:rPr>
-              <a:t>La IA marca el 2 % semanal y soporte corrige a distancia. Avisos en fallas masivas. 15 % de control.</a:t>
-            </a:r>
-            <a:endParaRPr lang="en-US" sz="1400" dirty="0"/>
-          </a:p>
-        </p:txBody>
-      </p:sp>
-      <p:sp>
-        <p:nvSpPr>
-          <p:cNvPr id="14" name="f2"/>
-          <p:cNvSpPr/>
-          <p:nvPr/>
-        </p:nvSpPr>
-        <p:spPr>
-          <a:xfrm>
-            <a:off x="8010144" y="2487168"/>
-            <a:ext cx="603504" cy="603504"/>
-          </a:xfrm>
-          <a:prstGeom prst="ellipse">
-            <a:avLst/>
-          </a:prstGeom>
-          <a:solidFill>
-            <a:srgbClr val="4CC9F0"/>
-          </a:solidFill>
-          <a:ln w="12700">
-            <a:solidFill>
-              <a:srgbClr val="4CC9F0"/>
-            </a:solidFill>
-            <a:prstDash val="solid"/>
-          </a:ln>
-        </p:spPr>
-      </p:sp>
-      <p:sp>
-        <p:nvSpPr>
-          <p:cNvPr id="15" name="f2-t"/>
-          <p:cNvSpPr txBox="1"/>
-          <p:nvPr/>
-        </p:nvSpPr>
-        <p:spPr>
-          <a:xfrm>
-            <a:off x="8010144" y="2487168"/>
-            <a:ext cx="603504" cy="603504"/>
-          </a:xfrm>
-          <a:prstGeom prst="rect">
-            <a:avLst/>
-          </a:prstGeom>
-          <a:noFill/>
-          <a:ln/>
-        </p:spPr>
-        <p:txBody>
-          <a:bodyPr wrap="square" lIns="0" tIns="0" rIns="0" bIns="0" rtlCol="0" anchor="ctr"/>
-          <a:lstStyle/>
-          <a:p>
-            <a:pPr algn="ctr" indent="0" marL="0">
-              <a:buNone/>
-            </a:pPr>
-            <a:r>
-              <a:rPr lang="en-US" sz="2000" b="1" dirty="0">
-                <a:solidFill>
-                  <a:srgbClr val="0B1F5C"/>
-                </a:solidFill>
-              </a:rPr>
-              <a:t>3</a:t>
-            </a:r>
-            <a:endParaRPr lang="en-US" sz="2000" dirty="0"/>
-          </a:p>
-        </p:txBody>
-      </p:sp>
-      <p:sp>
-        <p:nvSpPr>
-          <p:cNvPr id="16" name="ft2"/>
-          <p:cNvSpPr txBox="1"/>
-          <p:nvPr/>
-        </p:nvSpPr>
-        <p:spPr>
-          <a:xfrm>
-            <a:off x="8759952" y="2450592"/>
-            <a:ext cx="2743200" cy="685800"/>
-          </a:xfrm>
-          <a:prstGeom prst="rect">
-            <a:avLst/>
-          </a:prstGeom>
-          <a:noFill/>
-          <a:ln/>
-        </p:spPr>
-        <p:txBody>
-          <a:bodyPr wrap="square" lIns="0" tIns="0" rIns="0" bIns="0" rtlCol="0" anchor="ctr"/>
-          <a:lstStyle/>
-          <a:p>
-            <a:pPr indent="0" marL="0">
-              <a:buNone/>
-            </a:pPr>
-            <a:r>
-              <a:rPr lang="en-US" sz="1300" dirty="0">
-                <a:solidFill>
-                  <a:srgbClr val="C9D5FB"/>
-                </a:solidFill>
-              </a:rPr>
-              <a:t>Semanas 11–12</a:t>
-            </a:r>
-            <a:endParaRPr lang="en-US" sz="1600" dirty="0"/>
-          </a:p>
-          <a:p>
-            <a:pPr indent="0" marL="0">
-              <a:buNone/>
-            </a:pPr>
-            <a:r>
-              <a:rPr lang="en-US" sz="2000" b="1" dirty="0">
-                <a:solidFill>
-                  <a:srgbClr val="FFFFFF"/>
-                </a:solidFill>
-              </a:rPr>
-              <a:t>Decisión</a:t>
-            </a:r>
-            <a:endParaRPr lang="en-US" sz="1600" dirty="0"/>
-          </a:p>
-        </p:txBody>
-      </p:sp>
-      <p:sp>
-        <p:nvSpPr>
-          <p:cNvPr id="17" name="fd2"/>
-          <p:cNvSpPr txBox="1"/>
-          <p:nvPr/>
-        </p:nvSpPr>
-        <p:spPr>
-          <a:xfrm>
-            <a:off x="8010144" y="3246120"/>
-            <a:ext cx="3474720" cy="1005840"/>
-          </a:xfrm>
-          <a:prstGeom prst="rect">
-            <a:avLst/>
-          </a:prstGeom>
-          <a:noFill/>
-          <a:ln/>
-        </p:spPr>
-        <p:txBody>
-          <a:bodyPr wrap="square" lIns="0" tIns="0" rIns="0" bIns="0" rtlCol="0" anchor="t"/>
-          <a:lstStyle/>
-          <a:p>
-            <a:pPr indent="0" marL="0">
-              <a:buNone/>
-            </a:pPr>
-            <a:r>
-              <a:rPr lang="en-US" sz="1400" dirty="0">
-                <a:solidFill>
-                  <a:srgbClr val="C9D5FB"/>
-                </a:solidFill>
-              </a:rPr>
-              <a:t>Efecto con intervalo de confianza, costo real por visita y llamada evitada, y GO / NO-GO por frente.</a:t>
-            </a:r>
-            <a:endParaRPr lang="en-US" sz="1400" dirty="0"/>
-          </a:p>
-        </p:txBody>
-      </p:sp>
-      <p:sp>
-        <p:nvSpPr>
-          <p:cNvPr id="18" name="go"/>
-          <p:cNvSpPr/>
-          <p:nvPr/>
-        </p:nvSpPr>
-        <p:spPr>
-          <a:xfrm>
-            <a:off x="548640" y="4434840"/>
-            <a:ext cx="5440680" cy="1737360"/>
+            <a:off x="548640" y="2468880"/>
+            <a:ext cx="5440680" cy="3703320"/>
           </a:xfrm>
           <a:prstGeom prst="roundRect">
             <a:avLst>
-              <a:gd name="adj" fmla="val 7368"/>
+              <a:gd name="adj" fmla="val 3457"/>
             </a:avLst>
           </a:prstGeom>
           <a:solidFill>
@@ -4009,14 +3658,14 @@
       </p:sp>
       <p:sp>
         <p:nvSpPr>
-          <p:cNvPr id="19" name="go-t"/>
+          <p:cNvPr id="7" name="millicom-t"/>
           <p:cNvSpPr txBox="1"/>
           <p:nvPr/>
         </p:nvSpPr>
         <p:spPr>
           <a:xfrm>
-            <a:off x="777240" y="4544568"/>
-            <a:ext cx="5029200" cy="1554480"/>
+            <a:off x="822960" y="2651760"/>
+            <a:ext cx="4937760" cy="3383280"/>
           </a:xfrm>
           <a:prstGeom prst="rect">
             <a:avLst/>
@@ -4030,90 +3679,108 @@
           <a:p>
             <a:pPr indent="0" marL="0">
               <a:spcAft>
-                <a:spcPts val="200"/>
+                <a:spcPts val="600"/>
               </a:spcAft>
               <a:buNone/>
             </a:pPr>
             <a:r>
               <a:rPr lang="en-US" sz="1900" b="1" dirty="0">
                 <a:solidFill>
-                  <a:srgbClr val="2BB673"/>
-                </a:solidFill>
-              </a:rPr>
-              <a:t>GO si…</a:t>
-            </a:r>
-            <a:endParaRPr lang="en-US" sz="1400" dirty="0"/>
+                  <a:srgbClr val="0B1F5C"/>
+                </a:solidFill>
+              </a:rPr>
+              <a:t>Prioridades de Millicom en 2026</a:t>
+            </a:r>
+            <a:endParaRPr lang="en-US" sz="1500" dirty="0"/>
           </a:p>
           <a:p>
             <a:pPr marL="203200" indent="-203200">
               <a:spcAft>
-                <a:spcPts val="200"/>
+                <a:spcPts val="600"/>
               </a:spcAft>
               <a:buSzPct val="100000"/>
               <a:buChar char="•"/>
             </a:pPr>
             <a:r>
-              <a:rPr lang="en-US" sz="1400" dirty="0">
+              <a:rPr lang="en-US" sz="1500" dirty="0">
                 <a:solidFill>
                   <a:srgbClr val="334155"/>
                 </a:solidFill>
               </a:rPr>
-              <a:t>las visitas bajan 15 % o más (llamadas 12 % en Móvil), con significancia</a:t>
-            </a:r>
-            <a:endParaRPr lang="en-US" sz="1400" dirty="0"/>
+              <a:t>Mejor servicio: el cliente no sufre la falla ni tiene que llamar</a:t>
+            </a:r>
+            <a:endParaRPr lang="en-US" sz="1500" dirty="0"/>
           </a:p>
           <a:p>
             <a:pPr marL="203200" indent="-203200">
               <a:spcAft>
-                <a:spcPts val="200"/>
+                <a:spcPts val="600"/>
               </a:spcAft>
               <a:buSzPct val="100000"/>
               <a:buChar char="•"/>
             </a:pPr>
             <a:r>
-              <a:rPr lang="en-US" sz="1400" dirty="0">
+              <a:rPr lang="en-US" sz="1500" dirty="0">
                 <a:solidFill>
                   <a:srgbClr val="334155"/>
                 </a:solidFill>
               </a:rPr>
-              <a:t>menos de 2 % de clientes pide no recibir mensajes</a:t>
-            </a:r>
-            <a:endParaRPr lang="en-US" sz="1400" dirty="0"/>
+              <a:t>Eficiencia y flujo de caja: menos visitas y llamadas, sin inversión en red</a:t>
+            </a:r>
+            <a:endParaRPr lang="en-US" sz="1500" dirty="0"/>
           </a:p>
           <a:p>
             <a:pPr marL="203200" indent="-203200">
               <a:spcAft>
-                <a:spcPts val="200"/>
+                <a:spcPts val="600"/>
               </a:spcAft>
               <a:buSzPct val="100000"/>
               <a:buChar char="•"/>
             </a:pPr>
             <a:r>
-              <a:rPr lang="en-US" sz="1400" dirty="0">
+              <a:rPr lang="en-US" sz="1500" dirty="0">
                 <a:solidFill>
                   <a:srgbClr val="334155"/>
                 </a:solidFill>
               </a:rPr>
-              <a:t>la IA supera a la regla por 1.3× (si no, se usa la regla)</a:t>
-            </a:r>
-            <a:endParaRPr lang="en-US" sz="1400" dirty="0"/>
-          </a:p>
-        </p:txBody>
-      </p:sp>
-      <p:sp>
-        <p:nvSpPr>
-          <p:cNvPr id="20" name="seg"/>
+              <a:t>Crecer en valor: protege el hogar y a los clientes convergentes, que tienen cerca de la mitad del churn</a:t>
+            </a:r>
+            <a:endParaRPr lang="en-US" sz="1500" dirty="0"/>
+          </a:p>
+          <a:p>
+            <a:pPr marL="203200" indent="-203200">
+              <a:spcAft>
+                <a:spcPts val="600"/>
+              </a:spcAft>
+              <a:buSzPct val="100000"/>
+              <a:buChar char="•"/>
+            </a:pPr>
+            <a:r>
+              <a:rPr lang="en-US" sz="1500" dirty="0">
+                <a:solidFill>
+                  <a:srgbClr val="334155"/>
+                </a:solidFill>
+              </a:rPr>
+              <a:t>Simplicidad: empieza con archivos diarios del ACS, el NOC y el call center</a:t>
+            </a:r>
+            <a:endParaRPr lang="en-US" sz="1500" dirty="0"/>
+          </a:p>
+        </p:txBody>
+      </p:sp>
+      <p:sp>
+        <p:nvSpPr>
+          <p:cNvPr id="8" name="conatel"/>
           <p:cNvSpPr/>
           <p:nvPr/>
         </p:nvSpPr>
         <p:spPr>
           <a:xfrm>
-            <a:off x="6199632" y="4434840"/>
-            <a:ext cx="5440680" cy="1737360"/>
+            <a:off x="6199632" y="2468880"/>
+            <a:ext cx="5440680" cy="3703320"/>
           </a:xfrm>
           <a:prstGeom prst="roundRect">
             <a:avLst>
-              <a:gd name="adj" fmla="val 7368"/>
+              <a:gd name="adj" fmla="val 3457"/>
             </a:avLst>
           </a:prstGeom>
           <a:solidFill>
@@ -4136,14 +3803,14 @@
       </p:sp>
       <p:sp>
         <p:nvSpPr>
-          <p:cNvPr id="21" name="seg-t"/>
+          <p:cNvPr id="9" name="conatel-t"/>
           <p:cNvSpPr txBox="1"/>
           <p:nvPr/>
         </p:nvSpPr>
         <p:spPr>
           <a:xfrm>
-            <a:off x="6428232" y="4544568"/>
-            <a:ext cx="5029200" cy="1554480"/>
+            <a:off x="6473952" y="2651760"/>
+            <a:ext cx="4937760" cy="3383280"/>
           </a:xfrm>
           <a:prstGeom prst="rect">
             <a:avLst/>
@@ -4157,7 +3824,7 @@
           <a:p>
             <a:pPr indent="0" marL="0">
               <a:spcAft>
-                <a:spcPts val="200"/>
+                <a:spcPts val="600"/>
               </a:spcAft>
               <a:buNone/>
             </a:pPr>
@@ -4167,63 +3834,80 @@
                   <a:srgbClr val="4CC9F0"/>
                 </a:solidFill>
               </a:rPr>
-              <a:t>Privacidad y seguridad desde el día 1</a:t>
-            </a:r>
-            <a:endParaRPr lang="en-US" sz="1400" dirty="0"/>
+              <a:t>Reglamento NR001/26 de CONATEL</a:t>
+            </a:r>
+            <a:endParaRPr lang="en-US" sz="1500" dirty="0"/>
+          </a:p>
+          <a:p>
+            <a:pPr indent="0" marL="0">
+              <a:spcAft>
+                <a:spcPts val="600"/>
+              </a:spcAft>
+              <a:buNone/>
+            </a:pPr>
+            <a:r>
+              <a:rPr lang="en-US" sz="1300" dirty="0">
+                <a:solidFill>
+                  <a:srgbClr val="C9D5FB"/>
+                </a:solidFill>
+              </a:rPr>
+              <a:t>La Gaceta, 28 de febrero de 2026</a:t>
+            </a:r>
+            <a:endParaRPr lang="en-US" sz="1500" dirty="0"/>
           </a:p>
           <a:p>
             <a:pPr marL="203200" indent="-203200">
               <a:spcAft>
-                <a:spcPts val="200"/>
+                <a:spcPts val="600"/>
               </a:spcAft>
               <a:buSzPct val="100000"/>
               <a:buChar char="•"/>
             </a:pPr>
             <a:r>
-              <a:rPr lang="en-US" sz="1400" dirty="0">
+              <a:rPr lang="en-US" sz="1500" dirty="0">
                 <a:solidFill>
                   <a:srgbClr val="FFFFFF"/>
                 </a:solidFill>
               </a:rPr>
-              <a:t>Solo datos técnicos del módem y la línea: nunca contenido ni navegación</a:t>
-            </a:r>
-            <a:endParaRPr lang="en-US" sz="1400" dirty="0"/>
+              <a:t>Art. 39 (15): avisar a tiempo de averías e interrupciones y su plazo de normalización, por SMS y otros medios</a:t>
+            </a:r>
+            <a:endParaRPr lang="en-US" sz="1500" dirty="0"/>
           </a:p>
           <a:p>
             <a:pPr marL="203200" indent="-203200">
               <a:spcAft>
-                <a:spcPts val="200"/>
+                <a:spcPts val="600"/>
               </a:spcAft>
               <a:buSzPct val="100000"/>
               <a:buChar char="•"/>
             </a:pPr>
             <a:r>
-              <a:rPr lang="en-US" sz="1400" dirty="0">
+              <a:rPr lang="en-US" sz="1500" dirty="0">
                 <a:solidFill>
                   <a:srgbClr val="FFFFFF"/>
                 </a:solidFill>
               </a:rPr>
-              <a:t>GDPR como estándar, ISO 27001/27701/42001 y OWASP</a:t>
-            </a:r>
-            <a:endParaRPr lang="en-US" sz="1400" dirty="0"/>
+              <a:t>Art. 5 (10): compensación automática y reporte de la duración y las zonas de cada falla</a:t>
+            </a:r>
+            <a:endParaRPr lang="en-US" sz="1500" dirty="0"/>
           </a:p>
           <a:p>
             <a:pPr marL="203200" indent="-203200">
               <a:spcAft>
-                <a:spcPts val="200"/>
+                <a:spcPts val="600"/>
               </a:spcAft>
               <a:buSzPct val="100000"/>
               <a:buChar char="•"/>
             </a:pPr>
             <a:r>
-              <a:rPr lang="en-US" sz="1400" dirty="0">
+              <a:rPr lang="en-US" sz="1500" dirty="0">
                 <a:solidFill>
                   <a:srgbClr val="FFFFFF"/>
                 </a:solidFill>
               </a:rPr>
-              <a:t>Red team propio: 12 ataques probados y corregidos</a:t>
-            </a:r>
-            <a:endParaRPr lang="en-US" sz="1400" dirty="0"/>
+              <a:t>Art. 5 (17 y 18): con 10 días sin resolver o más de 24 h sin servicio al mes, el cliente se va sin penalidad</a:t>
+            </a:r>
+            <a:endParaRPr lang="en-US" sz="1500" dirty="0"/>
           </a:p>
         </p:txBody>
       </p:sp>
@@ -4356,7 +4040,7 @@
                   <a:srgbClr val="0B1F5C"/>
                 </a:solidFill>
               </a:rPr>
-              <a:t>El pedido</a:t>
+              <a:t>Plan</a:t>
             </a:r>
             <a:endParaRPr lang="en-US" sz="2400" dirty="0"/>
           </a:p>
@@ -4394,7 +4078,7 @@
                   <a:srgbClr val="4CC9F0"/>
                 </a:solidFill>
               </a:rPr>
-              <a:t>¿Qué necesitamos de los Sharks?</a:t>
+              <a:t>¿Cómo lo hacemos realidad?</a:t>
             </a:r>
             <a:endParaRPr lang="en-US" sz="1700" dirty="0"/>
           </a:p>
@@ -4432,7 +4116,7 @@
                   <a:schemeClr val="bg1"/>
                 </a:solidFill>
               </a:rPr>
-              <a:t>Una inversión acotada para decidir con datos reales de Tigo</a:t>
+              <a:t>Piloto de 12 semanas en San Pedro Sula, con GO / NO-GO medible</a:t>
             </a:r>
             <a:endParaRPr lang="en-US" sz="3000" dirty="0"/>
           </a:p>
@@ -4440,14 +4124,14 @@
       </p:sp>
       <p:sp>
         <p:nvSpPr>
-          <p:cNvPr id="6" name="k0"/>
+          <p:cNvPr id="6" name="f0"/>
           <p:cNvSpPr/>
           <p:nvPr/>
         </p:nvSpPr>
         <p:spPr>
           <a:xfrm>
             <a:off x="548640" y="2487168"/>
-            <a:ext cx="566928" cy="566928"/>
+            <a:ext cx="603504" cy="603504"/>
           </a:xfrm>
           <a:prstGeom prst="ellipse">
             <a:avLst/>
@@ -4465,14 +4149,14 @@
       </p:sp>
       <p:sp>
         <p:nvSpPr>
-          <p:cNvPr id="7" name="k0-t"/>
+          <p:cNvPr id="7" name="f0-t"/>
           <p:cNvSpPr txBox="1"/>
           <p:nvPr/>
         </p:nvSpPr>
         <p:spPr>
           <a:xfrm>
             <a:off x="548640" y="2487168"/>
-            <a:ext cx="566928" cy="566928"/>
+            <a:ext cx="603504" cy="603504"/>
           </a:xfrm>
           <a:prstGeom prst="rect">
             <a:avLst/>
@@ -4488,27 +4172,77 @@
               <a:buNone/>
             </a:pPr>
             <a:r>
-              <a:rPr lang="en-US" sz="1900" b="1" dirty="0">
+              <a:rPr lang="en-US" sz="2000" b="1" dirty="0">
                 <a:solidFill>
                   <a:srgbClr val="0B1F5C"/>
                 </a:solidFill>
               </a:rPr>
               <a:t>1</a:t>
             </a:r>
-            <a:endParaRPr lang="en-US" sz="1900" dirty="0"/>
-          </a:p>
-        </p:txBody>
-      </p:sp>
-      <p:sp>
-        <p:nvSpPr>
-          <p:cNvPr id="8" name="kt0"/>
+            <a:endParaRPr lang="en-US" sz="2000" dirty="0"/>
+          </a:p>
+        </p:txBody>
+      </p:sp>
+      <p:sp>
+        <p:nvSpPr>
+          <p:cNvPr id="8" name="ft0"/>
           <p:cNvSpPr txBox="1"/>
           <p:nvPr/>
         </p:nvSpPr>
         <p:spPr>
           <a:xfrm>
-            <a:off x="1325880" y="2441448"/>
-            <a:ext cx="5760720" cy="841248"/>
+            <a:off x="1298448" y="2450592"/>
+            <a:ext cx="2743200" cy="685800"/>
+          </a:xfrm>
+          <a:prstGeom prst="rect">
+            <a:avLst/>
+          </a:prstGeom>
+          <a:noFill/>
+          <a:ln/>
+        </p:spPr>
+        <p:txBody>
+          <a:bodyPr wrap="square" lIns="0" tIns="0" rIns="0" bIns="0" rtlCol="0" anchor="ctr"/>
+          <a:lstStyle/>
+          <a:p>
+            <a:pPr indent="0" marL="0">
+              <a:buNone/>
+            </a:pPr>
+            <a:r>
+              <a:rPr lang="en-US" sz="1300" dirty="0">
+                <a:solidFill>
+                  <a:srgbClr val="C9D5FB"/>
+                </a:solidFill>
+              </a:rPr>
+              <a:t>Semanas 0–2</a:t>
+            </a:r>
+            <a:endParaRPr lang="en-US" sz="1600" dirty="0"/>
+          </a:p>
+          <a:p>
+            <a:pPr indent="0" marL="0">
+              <a:buNone/>
+            </a:pPr>
+            <a:r>
+              <a:rPr lang="en-US" sz="2000" b="1" dirty="0">
+                <a:solidFill>
+                  <a:srgbClr val="FFFFFF"/>
+                </a:solidFill>
+              </a:rPr>
+              <a:t>Preparación</a:t>
+            </a:r>
+            <a:endParaRPr lang="en-US" sz="1600" dirty="0"/>
+          </a:p>
+        </p:txBody>
+      </p:sp>
+      <p:sp>
+        <p:nvSpPr>
+          <p:cNvPr id="9" name="fd0"/>
+          <p:cNvSpPr txBox="1"/>
+          <p:nvPr/>
+        </p:nvSpPr>
+        <p:spPr>
+          <a:xfrm>
+            <a:off x="548640" y="3246120"/>
+            <a:ext cx="3474720" cy="1005840"/>
           </a:xfrm>
           <a:prstGeom prst="rect">
             <a:avLst/>
@@ -4524,41 +4258,27 @@
               <a:buNone/>
             </a:pPr>
             <a:r>
-              <a:rPr lang="en-US" sz="1900" b="1" dirty="0">
-                <a:solidFill>
-                  <a:srgbClr val="FFFFFF"/>
-                </a:solidFill>
-              </a:rPr>
-              <a:t>Datos</a:t>
-            </a:r>
-            <a:endParaRPr lang="en-US" sz="1600" dirty="0"/>
-          </a:p>
-          <a:p>
-            <a:pPr indent="0" marL="0">
-              <a:buNone/>
-            </a:pPr>
-            <a:r>
               <a:rPr lang="en-US" sz="1400" dirty="0">
                 <a:solidFill>
                   <a:srgbClr val="C9D5FB"/>
                 </a:solidFill>
               </a:rPr>
-              <a:t>Archivos diarios del ACS, NOC, CRM, call center y órdenes de campo de San Pedro Sula</a:t>
-            </a:r>
-            <a:endParaRPr lang="en-US" sz="1600" dirty="0"/>
-          </a:p>
-        </p:txBody>
-      </p:sp>
-      <p:sp>
-        <p:nvSpPr>
-          <p:cNvPr id="9" name="k1"/>
+              <a:t>Datos del ACS, NOC, CRM, call center y campo por archivo diario. Prueba retrospectiva IA vs. regla.</a:t>
+            </a:r>
+            <a:endParaRPr lang="en-US" sz="1400" dirty="0"/>
+          </a:p>
+        </p:txBody>
+      </p:sp>
+      <p:sp>
+        <p:nvSpPr>
+          <p:cNvPr id="10" name="f1"/>
           <p:cNvSpPr/>
           <p:nvPr/>
         </p:nvSpPr>
         <p:spPr>
           <a:xfrm>
-            <a:off x="548640" y="3419856"/>
-            <a:ext cx="566928" cy="566928"/>
+            <a:off x="4279392" y="2487168"/>
+            <a:ext cx="603504" cy="603504"/>
           </a:xfrm>
           <a:prstGeom prst="ellipse">
             <a:avLst/>
@@ -4576,14 +4296,14 @@
       </p:sp>
       <p:sp>
         <p:nvSpPr>
-          <p:cNvPr id="10" name="k1-t"/>
+          <p:cNvPr id="11" name="f1-t"/>
           <p:cNvSpPr txBox="1"/>
           <p:nvPr/>
         </p:nvSpPr>
         <p:spPr>
           <a:xfrm>
-            <a:off x="548640" y="3419856"/>
-            <a:ext cx="566928" cy="566928"/>
+            <a:off x="4279392" y="2487168"/>
+            <a:ext cx="603504" cy="603504"/>
           </a:xfrm>
           <a:prstGeom prst="rect">
             <a:avLst/>
@@ -4599,27 +4319,77 @@
               <a:buNone/>
             </a:pPr>
             <a:r>
-              <a:rPr lang="en-US" sz="1900" b="1" dirty="0">
+              <a:rPr lang="en-US" sz="2000" b="1" dirty="0">
                 <a:solidFill>
                   <a:srgbClr val="0B1F5C"/>
                 </a:solidFill>
               </a:rPr>
               <a:t>2</a:t>
             </a:r>
-            <a:endParaRPr lang="en-US" sz="1900" dirty="0"/>
-          </a:p>
-        </p:txBody>
-      </p:sp>
-      <p:sp>
-        <p:nvSpPr>
-          <p:cNvPr id="11" name="kt1"/>
+            <a:endParaRPr lang="en-US" sz="2000" dirty="0"/>
+          </a:p>
+        </p:txBody>
+      </p:sp>
+      <p:sp>
+        <p:nvSpPr>
+          <p:cNvPr id="12" name="ft1"/>
           <p:cNvSpPr txBox="1"/>
           <p:nvPr/>
         </p:nvSpPr>
         <p:spPr>
           <a:xfrm>
-            <a:off x="1325880" y="3374136"/>
-            <a:ext cx="5760720" cy="841248"/>
+            <a:off x="5029200" y="2450592"/>
+            <a:ext cx="2743200" cy="685800"/>
+          </a:xfrm>
+          <a:prstGeom prst="rect">
+            <a:avLst/>
+          </a:prstGeom>
+          <a:noFill/>
+          <a:ln/>
+        </p:spPr>
+        <p:txBody>
+          <a:bodyPr wrap="square" lIns="0" tIns="0" rIns="0" bIns="0" rtlCol="0" anchor="ctr"/>
+          <a:lstStyle/>
+          <a:p>
+            <a:pPr indent="0" marL="0">
+              <a:buNone/>
+            </a:pPr>
+            <a:r>
+              <a:rPr lang="en-US" sz="1300" dirty="0">
+                <a:solidFill>
+                  <a:srgbClr val="C9D5FB"/>
+                </a:solidFill>
+              </a:rPr>
+              <a:t>Semanas 3–10</a:t>
+            </a:r>
+            <a:endParaRPr lang="en-US" sz="1600" dirty="0"/>
+          </a:p>
+          <a:p>
+            <a:pPr indent="0" marL="0">
+              <a:buNone/>
+            </a:pPr>
+            <a:r>
+              <a:rPr lang="en-US" sz="2000" b="1" dirty="0">
+                <a:solidFill>
+                  <a:srgbClr val="FFFFFF"/>
+                </a:solidFill>
+              </a:rPr>
+              <a:t>Piloto en vivo</a:t>
+            </a:r>
+            <a:endParaRPr lang="en-US" sz="1600" dirty="0"/>
+          </a:p>
+        </p:txBody>
+      </p:sp>
+      <p:sp>
+        <p:nvSpPr>
+          <p:cNvPr id="13" name="fd1"/>
+          <p:cNvSpPr txBox="1"/>
+          <p:nvPr/>
+        </p:nvSpPr>
+        <p:spPr>
+          <a:xfrm>
+            <a:off x="4279392" y="3246120"/>
+            <a:ext cx="3474720" cy="1005840"/>
           </a:xfrm>
           <a:prstGeom prst="rect">
             <a:avLst/>
@@ -4635,41 +4405,27 @@
               <a:buNone/>
             </a:pPr>
             <a:r>
-              <a:rPr lang="en-US" sz="1900" b="1" dirty="0">
-                <a:solidFill>
-                  <a:srgbClr val="FFFFFF"/>
-                </a:solidFill>
-              </a:rPr>
-              <a:t>Equipo</a:t>
-            </a:r>
-            <a:endParaRPr lang="en-US" sz="1600" dirty="0"/>
-          </a:p>
-          <a:p>
-            <a:pPr indent="0" marL="0">
-              <a:buNone/>
-            </a:pPr>
-            <a:r>
               <a:rPr lang="en-US" sz="1400" dirty="0">
                 <a:solidFill>
                   <a:srgbClr val="C9D5FB"/>
                 </a:solidFill>
               </a:rPr>
-              <a:t>Un patrocinador, enlaces de NOC e ingeniería de acceso, soporte N2 y un analista al 50 %</a:t>
-            </a:r>
-            <a:endParaRPr lang="en-US" sz="1600" dirty="0"/>
-          </a:p>
-        </p:txBody>
-      </p:sp>
-      <p:sp>
-        <p:nvSpPr>
-          <p:cNvPr id="12" name="k2"/>
+              <a:t>La IA marca el 2 % semanal y soporte corrige a distancia. Avisos en fallas masivas. 15 % de control.</a:t>
+            </a:r>
+            <a:endParaRPr lang="en-US" sz="1400" dirty="0"/>
+          </a:p>
+        </p:txBody>
+      </p:sp>
+      <p:sp>
+        <p:nvSpPr>
+          <p:cNvPr id="14" name="f2"/>
           <p:cNvSpPr/>
           <p:nvPr/>
         </p:nvSpPr>
         <p:spPr>
           <a:xfrm>
-            <a:off x="548640" y="4352544"/>
-            <a:ext cx="566928" cy="566928"/>
+            <a:off x="8010144" y="2487168"/>
+            <a:ext cx="603504" cy="603504"/>
           </a:xfrm>
           <a:prstGeom prst="ellipse">
             <a:avLst/>
@@ -4687,14 +4443,14 @@
       </p:sp>
       <p:sp>
         <p:nvSpPr>
-          <p:cNvPr id="13" name="k2-t"/>
+          <p:cNvPr id="15" name="f2-t"/>
           <p:cNvSpPr txBox="1"/>
           <p:nvPr/>
         </p:nvSpPr>
         <p:spPr>
           <a:xfrm>
-            <a:off x="548640" y="4352544"/>
-            <a:ext cx="566928" cy="566928"/>
+            <a:off x="8010144" y="2487168"/>
+            <a:ext cx="603504" cy="603504"/>
           </a:xfrm>
           <a:prstGeom prst="rect">
             <a:avLst/>
@@ -4710,27 +4466,77 @@
               <a:buNone/>
             </a:pPr>
             <a:r>
-              <a:rPr lang="en-US" sz="1900" b="1" dirty="0">
+              <a:rPr lang="en-US" sz="2000" b="1" dirty="0">
                 <a:solidFill>
                   <a:srgbClr val="0B1F5C"/>
                 </a:solidFill>
               </a:rPr>
               <a:t>3</a:t>
             </a:r>
-            <a:endParaRPr lang="en-US" sz="1900" dirty="0"/>
-          </a:p>
-        </p:txBody>
-      </p:sp>
-      <p:sp>
-        <p:nvSpPr>
-          <p:cNvPr id="14" name="kt2"/>
+            <a:endParaRPr lang="en-US" sz="2000" dirty="0"/>
+          </a:p>
+        </p:txBody>
+      </p:sp>
+      <p:sp>
+        <p:nvSpPr>
+          <p:cNvPr id="16" name="ft2"/>
           <p:cNvSpPr txBox="1"/>
           <p:nvPr/>
         </p:nvSpPr>
         <p:spPr>
           <a:xfrm>
-            <a:off x="1325880" y="4306824"/>
-            <a:ext cx="5760720" cy="841248"/>
+            <a:off x="8759952" y="2450592"/>
+            <a:ext cx="2743200" cy="685800"/>
+          </a:xfrm>
+          <a:prstGeom prst="rect">
+            <a:avLst/>
+          </a:prstGeom>
+          <a:noFill/>
+          <a:ln/>
+        </p:spPr>
+        <p:txBody>
+          <a:bodyPr wrap="square" lIns="0" tIns="0" rIns="0" bIns="0" rtlCol="0" anchor="ctr"/>
+          <a:lstStyle/>
+          <a:p>
+            <a:pPr indent="0" marL="0">
+              <a:buNone/>
+            </a:pPr>
+            <a:r>
+              <a:rPr lang="en-US" sz="1300" dirty="0">
+                <a:solidFill>
+                  <a:srgbClr val="C9D5FB"/>
+                </a:solidFill>
+              </a:rPr>
+              <a:t>Semanas 11–12</a:t>
+            </a:r>
+            <a:endParaRPr lang="en-US" sz="1600" dirty="0"/>
+          </a:p>
+          <a:p>
+            <a:pPr indent="0" marL="0">
+              <a:buNone/>
+            </a:pPr>
+            <a:r>
+              <a:rPr lang="en-US" sz="2000" b="1" dirty="0">
+                <a:solidFill>
+                  <a:srgbClr val="FFFFFF"/>
+                </a:solidFill>
+              </a:rPr>
+              <a:t>Decisión</a:t>
+            </a:r>
+            <a:endParaRPr lang="en-US" sz="1600" dirty="0"/>
+          </a:p>
+        </p:txBody>
+      </p:sp>
+      <p:sp>
+        <p:nvSpPr>
+          <p:cNvPr id="17" name="fd2"/>
+          <p:cNvSpPr txBox="1"/>
+          <p:nvPr/>
+        </p:nvSpPr>
+        <p:spPr>
+          <a:xfrm>
+            <a:off x="8010144" y="3246120"/>
+            <a:ext cx="3474720" cy="1005840"/>
           </a:xfrm>
           <a:prstGeom prst="rect">
             <a:avLst/>
@@ -4746,164 +4552,39 @@
               <a:buNone/>
             </a:pPr>
             <a:r>
-              <a:rPr lang="en-US" sz="1900" b="1" dirty="0">
-                <a:solidFill>
-                  <a:srgbClr val="FFFFFF"/>
-                </a:solidFill>
-              </a:rPr>
-              <a:t>Canal y cumplimiento</a:t>
-            </a:r>
-            <a:endParaRPr lang="en-US" sz="1600" dirty="0"/>
-          </a:p>
-          <a:p>
-            <a:pPr indent="0" marL="0">
-              <a:buNone/>
-            </a:pPr>
-            <a:r>
               <a:rPr lang="en-US" sz="1400" dirty="0">
                 <a:solidFill>
                   <a:srgbClr val="C9D5FB"/>
                 </a:solidFill>
               </a:rPr>
-              <a:t>Plantillas de WhatsApp Business y visto bueno de Legal y Seguridad</a:t>
-            </a:r>
-            <a:endParaRPr lang="en-US" sz="1600" dirty="0"/>
-          </a:p>
-        </p:txBody>
-      </p:sp>
-      <p:sp>
-        <p:nvSpPr>
-          <p:cNvPr id="15" name="k3"/>
+              <a:t>Efecto con intervalo de confianza, costo real por visita y llamada evitada, y GO / NO-GO por frente.</a:t>
+            </a:r>
+            <a:endParaRPr lang="en-US" sz="1400" dirty="0"/>
+          </a:p>
+        </p:txBody>
+      </p:sp>
+      <p:sp>
+        <p:nvSpPr>
+          <p:cNvPr id="18" name="go"/>
           <p:cNvSpPr/>
           <p:nvPr/>
         </p:nvSpPr>
         <p:spPr>
           <a:xfrm>
-            <a:off x="548640" y="5285232"/>
-            <a:ext cx="566928" cy="566928"/>
-          </a:xfrm>
-          <a:prstGeom prst="ellipse">
-            <a:avLst/>
+            <a:off x="548640" y="4434840"/>
+            <a:ext cx="5440680" cy="1737360"/>
+          </a:xfrm>
+          <a:prstGeom prst="roundRect">
+            <a:avLst>
+              <a:gd name="adj" fmla="val 7368"/>
+            </a:avLst>
           </a:prstGeom>
           <a:solidFill>
-            <a:srgbClr val="4CC9F0"/>
+            <a:srgbClr val="FFFFFF"/>
           </a:solidFill>
           <a:ln w="12700">
             <a:solidFill>
-              <a:srgbClr val="4CC9F0"/>
-            </a:solidFill>
-            <a:prstDash val="solid"/>
-          </a:ln>
-        </p:spPr>
-      </p:sp>
-      <p:sp>
-        <p:nvSpPr>
-          <p:cNvPr id="16" name="k3-t"/>
-          <p:cNvSpPr txBox="1"/>
-          <p:nvPr/>
-        </p:nvSpPr>
-        <p:spPr>
-          <a:xfrm>
-            <a:off x="548640" y="5285232"/>
-            <a:ext cx="566928" cy="566928"/>
-          </a:xfrm>
-          <a:prstGeom prst="rect">
-            <a:avLst/>
-          </a:prstGeom>
-          <a:noFill/>
-          <a:ln/>
-        </p:spPr>
-        <p:txBody>
-          <a:bodyPr wrap="square" lIns="0" tIns="0" rIns="0" bIns="0" rtlCol="0" anchor="ctr"/>
-          <a:lstStyle/>
-          <a:p>
-            <a:pPr algn="ctr" indent="0" marL="0">
-              <a:buNone/>
-            </a:pPr>
-            <a:r>
-              <a:rPr lang="en-US" sz="1900" b="1" dirty="0">
-                <a:solidFill>
-                  <a:srgbClr val="0B1F5C"/>
-                </a:solidFill>
-              </a:rPr>
-              <a:t>4</a:t>
-            </a:r>
-            <a:endParaRPr lang="en-US" sz="1900" dirty="0"/>
-          </a:p>
-        </p:txBody>
-      </p:sp>
-      <p:sp>
-        <p:nvSpPr>
-          <p:cNvPr id="17" name="kt3"/>
-          <p:cNvSpPr txBox="1"/>
-          <p:nvPr/>
-        </p:nvSpPr>
-        <p:spPr>
-          <a:xfrm>
-            <a:off x="1325880" y="5239512"/>
-            <a:ext cx="5760720" cy="841248"/>
-          </a:xfrm>
-          <a:prstGeom prst="rect">
-            <a:avLst/>
-          </a:prstGeom>
-          <a:noFill/>
-          <a:ln/>
-        </p:spPr>
-        <p:txBody>
-          <a:bodyPr wrap="square" lIns="0" tIns="0" rIns="0" bIns="0" rtlCol="0" anchor="t"/>
-          <a:lstStyle/>
-          <a:p>
-            <a:pPr indent="0" marL="0">
-              <a:buNone/>
-            </a:pPr>
-            <a:r>
-              <a:rPr lang="en-US" sz="1900" b="1" dirty="0">
-                <a:solidFill>
-                  <a:srgbClr val="FFFFFF"/>
-                </a:solidFill>
-              </a:rPr>
-              <a:t>Decisión</a:t>
-            </a:r>
-            <a:endParaRPr lang="en-US" sz="1600" dirty="0"/>
-          </a:p>
-          <a:p>
-            <a:pPr indent="0" marL="0">
-              <a:buNone/>
-            </a:pPr>
-            <a:r>
-              <a:rPr lang="en-US" sz="1400" dirty="0">
-                <a:solidFill>
-                  <a:srgbClr val="C9D5FB"/>
-                </a:solidFill>
-              </a:rPr>
-              <a:t>En la semana 12, con números reales, ustedes deciden GO o NO-GO por frente</a:t>
-            </a:r>
-            <a:endParaRPr lang="en-US" sz="1600" dirty="0"/>
-          </a:p>
-        </p:txBody>
-      </p:sp>
-      <p:sp>
-        <p:nvSpPr>
-          <p:cNvPr id="18" name="inv"/>
-          <p:cNvSpPr/>
-          <p:nvPr/>
-        </p:nvSpPr>
-        <p:spPr>
-          <a:xfrm>
-            <a:off x="7452360" y="2468880"/>
-            <a:ext cx="4187952" cy="3703320"/>
-          </a:xfrm>
-          <a:prstGeom prst="roundRect">
-            <a:avLst>
-              <a:gd name="adj" fmla="val 3457"/>
-            </a:avLst>
-          </a:prstGeom>
-          <a:solidFill>
-            <a:srgbClr val="FFC629"/>
-          </a:solidFill>
-          <a:ln w="12700">
-            <a:solidFill>
-              <a:srgbClr val="FFC629"/>
+              <a:srgbClr val="FFFFFF"/>
             </a:solidFill>
             <a:prstDash val="solid"/>
           </a:ln>
@@ -4918,122 +4599,141 @@
       </p:sp>
       <p:sp>
         <p:nvSpPr>
-          <p:cNvPr id="19" name="inv-t"/>
+          <p:cNvPr id="19" name="go-t"/>
           <p:cNvSpPr txBox="1"/>
           <p:nvPr/>
         </p:nvSpPr>
         <p:spPr>
           <a:xfrm>
-            <a:off x="7772400" y="2697480"/>
-            <a:ext cx="3566160" cy="411480"/>
-          </a:xfrm>
-          <a:prstGeom prst="rect">
-            <a:avLst/>
-          </a:prstGeom>
-          <a:noFill/>
-          <a:ln/>
-        </p:spPr>
-        <p:txBody>
-          <a:bodyPr wrap="square" lIns="0" tIns="0" rIns="0" bIns="0" rtlCol="0" anchor="ctr"/>
-          <a:lstStyle/>
-          <a:p>
-            <a:pPr indent="0" marL="0">
+            <a:off x="777240" y="4544568"/>
+            <a:ext cx="5029200" cy="1554480"/>
+          </a:xfrm>
+          <a:prstGeom prst="rect">
+            <a:avLst/>
+          </a:prstGeom>
+          <a:noFill/>
+          <a:ln/>
+        </p:spPr>
+        <p:txBody>
+          <a:bodyPr wrap="square" lIns="0" tIns="0" rIns="0" bIns="0" rtlCol="0" anchor="t"/>
+          <a:lstStyle/>
+          <a:p>
+            <a:pPr indent="0" marL="0">
+              <a:spcAft>
+                <a:spcPts val="200"/>
+              </a:spcAft>
               <a:buNone/>
             </a:pPr>
             <a:r>
               <a:rPr lang="en-US" sz="1900" b="1" dirty="0">
                 <a:solidFill>
-                  <a:srgbClr val="0B1F5C"/>
-                </a:solidFill>
-              </a:rPr>
-              <a:t>Inversión del piloto</a:t>
-            </a:r>
-            <a:endParaRPr lang="en-US" sz="1900" dirty="0"/>
-          </a:p>
-        </p:txBody>
-      </p:sp>
-      <p:sp>
-        <p:nvSpPr>
-          <p:cNvPr id="20" name="inv-v"/>
+                  <a:srgbClr val="2BB673"/>
+                </a:solidFill>
+              </a:rPr>
+              <a:t>GO si…</a:t>
+            </a:r>
+            <a:endParaRPr lang="en-US" sz="1400" dirty="0"/>
+          </a:p>
+          <a:p>
+            <a:pPr marL="203200" indent="-203200">
+              <a:spcAft>
+                <a:spcPts val="200"/>
+              </a:spcAft>
+              <a:buSzPct val="100000"/>
+              <a:buChar char="•"/>
+            </a:pPr>
+            <a:r>
+              <a:rPr lang="en-US" sz="1400" dirty="0">
+                <a:solidFill>
+                  <a:srgbClr val="334155"/>
+                </a:solidFill>
+              </a:rPr>
+              <a:t>las visitas bajan 15 % o más (llamadas 12 % en Móvil), con significancia</a:t>
+            </a:r>
+            <a:endParaRPr lang="en-US" sz="1400" dirty="0"/>
+          </a:p>
+          <a:p>
+            <a:pPr marL="203200" indent="-203200">
+              <a:spcAft>
+                <a:spcPts val="200"/>
+              </a:spcAft>
+              <a:buSzPct val="100000"/>
+              <a:buChar char="•"/>
+            </a:pPr>
+            <a:r>
+              <a:rPr lang="en-US" sz="1400" dirty="0">
+                <a:solidFill>
+                  <a:srgbClr val="334155"/>
+                </a:solidFill>
+              </a:rPr>
+              <a:t>menos de 2 % de clientes pide no recibir mensajes</a:t>
+            </a:r>
+            <a:endParaRPr lang="en-US" sz="1400" dirty="0"/>
+          </a:p>
+          <a:p>
+            <a:pPr marL="203200" indent="-203200">
+              <a:spcAft>
+                <a:spcPts val="200"/>
+              </a:spcAft>
+              <a:buSzPct val="100000"/>
+              <a:buChar char="•"/>
+            </a:pPr>
+            <a:r>
+              <a:rPr lang="en-US" sz="1400" dirty="0">
+                <a:solidFill>
+                  <a:srgbClr val="334155"/>
+                </a:solidFill>
+              </a:rPr>
+              <a:t>la IA supera a la regla por 1.3× (si no, se usa la regla)</a:t>
+            </a:r>
+            <a:endParaRPr lang="en-US" sz="1400" dirty="0"/>
+          </a:p>
+        </p:txBody>
+      </p:sp>
+      <p:sp>
+        <p:nvSpPr>
+          <p:cNvPr id="20" name="seg"/>
+          <p:cNvSpPr/>
+          <p:nvPr/>
+        </p:nvSpPr>
+        <p:spPr>
+          <a:xfrm>
+            <a:off x="6199632" y="4434840"/>
+            <a:ext cx="5440680" cy="1737360"/>
+          </a:xfrm>
+          <a:prstGeom prst="roundRect">
+            <a:avLst>
+              <a:gd name="adj" fmla="val 7368"/>
+            </a:avLst>
+          </a:prstGeom>
+          <a:solidFill>
+            <a:srgbClr val="0B1F5C"/>
+          </a:solidFill>
+          <a:ln w="12700">
+            <a:solidFill>
+              <a:srgbClr val="0B1F5C"/>
+            </a:solidFill>
+            <a:prstDash val="solid"/>
+          </a:ln>
+          <a:effectLst>
+            <a:outerShdw sx="100000" sy="100000" kx="0" ky="0" algn="bl" rotWithShape="0" blurRad="101600" dist="38100" dir="5400000">
+              <a:srgbClr val="000A33">
+                <a:alpha val="25000"/>
+              </a:srgbClr>
+            </a:outerShdw>
+          </a:effectLst>
+        </p:spPr>
+      </p:sp>
+      <p:sp>
+        <p:nvSpPr>
+          <p:cNvPr id="21" name="seg-t"/>
           <p:cNvSpPr txBox="1"/>
           <p:nvPr/>
         </p:nvSpPr>
         <p:spPr>
           <a:xfrm>
-            <a:off x="7772400" y="3108960"/>
-            <a:ext cx="3566160" cy="914400"/>
-          </a:xfrm>
-          <a:prstGeom prst="rect">
-            <a:avLst/>
-          </a:prstGeom>
-          <a:noFill/>
-          <a:ln/>
-        </p:spPr>
-        <p:txBody>
-          <a:bodyPr wrap="square" lIns="0" tIns="0" rIns="0" bIns="0" rtlCol="0" anchor="ctr"/>
-          <a:lstStyle/>
-          <a:p>
-            <a:pPr indent="0" marL="0">
-              <a:buNone/>
-            </a:pPr>
-            <a:r>
-              <a:rPr lang="en-US" sz="5400" b="1" dirty="0">
-                <a:solidFill>
-                  <a:srgbClr val="0B1F5C"/>
-                </a:solidFill>
-              </a:rPr>
-              <a:t>L 770 mil</a:t>
-            </a:r>
-            <a:endParaRPr lang="en-US" sz="5400" dirty="0"/>
-          </a:p>
-        </p:txBody>
-      </p:sp>
-      <p:sp>
-        <p:nvSpPr>
-          <p:cNvPr id="21" name="inv-r"/>
-          <p:cNvSpPr txBox="1"/>
-          <p:nvPr/>
-        </p:nvSpPr>
-        <p:spPr>
-          <a:xfrm>
-            <a:off x="7772400" y="4023360"/>
-            <a:ext cx="3566160" cy="411480"/>
-          </a:xfrm>
-          <a:prstGeom prst="rect">
-            <a:avLst/>
-          </a:prstGeom>
-          <a:noFill/>
-          <a:ln/>
-        </p:spPr>
-        <p:txBody>
-          <a:bodyPr wrap="square" lIns="0" tIns="0" rIns="0" bIns="0" rtlCol="0" anchor="ctr"/>
-          <a:lstStyle/>
-          <a:p>
-            <a:pPr indent="0" marL="0">
-              <a:buNone/>
-            </a:pPr>
-            <a:r>
-              <a:rPr lang="en-US" sz="1600" b="1" dirty="0">
-                <a:solidFill>
-                  <a:srgbClr val="0B1F5C"/>
-                </a:solidFill>
-              </a:rPr>
-              <a:t>≈ US$ 28 mil · 12 semanas · 2 frentes</a:t>
-            </a:r>
-            <a:endParaRPr lang="en-US" sz="1600" dirty="0"/>
-          </a:p>
-        </p:txBody>
-      </p:sp>
-      <p:sp>
-        <p:nvSpPr>
-          <p:cNvPr id="22" name="inv-n"/>
-          <p:cNvSpPr txBox="1"/>
-          <p:nvPr/>
-        </p:nvSpPr>
-        <p:spPr>
-          <a:xfrm>
-            <a:off x="7772400" y="4617720"/>
-            <a:ext cx="3566160" cy="1280160"/>
+            <a:off x="6428232" y="4544568"/>
+            <a:ext cx="5029200" cy="1554480"/>
           </a:xfrm>
           <a:prstGeom prst="rect">
             <a:avLst/>
@@ -5046,17 +4746,74 @@
           <a:lstStyle/>
           <a:p>
             <a:pPr indent="0" marL="0">
-              <a:buNone/>
-            </a:pPr>
-            <a:r>
-              <a:rPr lang="en-US" sz="1500" dirty="0">
-                <a:solidFill>
-                  <a:srgbClr val="0B1F5C"/>
-                </a:solidFill>
-              </a:rPr>
-              <a:t>Si es GO, el escenario base deja L 4.3 M netos en el año 1 a nivel nacional.</a:t>
-            </a:r>
-            <a:endParaRPr lang="en-US" sz="1500" dirty="0"/>
+              <a:spcAft>
+                <a:spcPts val="200"/>
+              </a:spcAft>
+              <a:buNone/>
+            </a:pPr>
+            <a:r>
+              <a:rPr lang="en-US" sz="1900" b="1" dirty="0">
+                <a:solidFill>
+                  <a:srgbClr val="4CC9F0"/>
+                </a:solidFill>
+              </a:rPr>
+              <a:t>Privacidad y seguridad desde el día 1</a:t>
+            </a:r>
+            <a:endParaRPr lang="en-US" sz="1400" dirty="0"/>
+          </a:p>
+          <a:p>
+            <a:pPr marL="203200" indent="-203200">
+              <a:spcAft>
+                <a:spcPts val="200"/>
+              </a:spcAft>
+              <a:buSzPct val="100000"/>
+              <a:buChar char="•"/>
+            </a:pPr>
+            <a:r>
+              <a:rPr lang="en-US" sz="1400" dirty="0">
+                <a:solidFill>
+                  <a:srgbClr val="FFFFFF"/>
+                </a:solidFill>
+              </a:rPr>
+              <a:t>Solo datos técnicos del módem y la línea: nunca contenido ni navegación</a:t>
+            </a:r>
+            <a:endParaRPr lang="en-US" sz="1400" dirty="0"/>
+          </a:p>
+          <a:p>
+            <a:pPr marL="203200" indent="-203200">
+              <a:spcAft>
+                <a:spcPts val="200"/>
+              </a:spcAft>
+              <a:buSzPct val="100000"/>
+              <a:buChar char="•"/>
+            </a:pPr>
+            <a:r>
+              <a:rPr lang="en-US" sz="1400" dirty="0">
+                <a:solidFill>
+                  <a:srgbClr val="FFFFFF"/>
+                </a:solidFill>
+              </a:rPr>
+              <a:t>GDPR como estándar, ISO 27001/27701/42001 y OWASP</a:t>
+            </a:r>
+            <a:endParaRPr lang="en-US" sz="1400" dirty="0"/>
+          </a:p>
+          <a:p>
+            <a:pPr marL="203200" indent="-203200">
+              <a:spcAft>
+                <a:spcPts val="200"/>
+              </a:spcAft>
+              <a:buSzPct val="100000"/>
+              <a:buChar char="•"/>
+            </a:pPr>
+            <a:r>
+              <a:rPr lang="en-US" sz="1400" dirty="0">
+                <a:solidFill>
+                  <a:srgbClr val="FFFFFF"/>
+                </a:solidFill>
+              </a:rPr>
+              <a:t>Red team propio: 12 ataques probados y corregidos</a:t>
+            </a:r>
+            <a:endParaRPr lang="en-US" sz="1400" dirty="0"/>
           </a:p>
         </p:txBody>
       </p:sp>
@@ -5132,6 +4889,839 @@
       </p:grpSpPr>
       <p:sp>
         <p:nvSpPr>
+          <p:cNvPr id="2" name="pastilla"/>
+          <p:cNvSpPr/>
+          <p:nvPr/>
+        </p:nvSpPr>
+        <p:spPr>
+          <a:xfrm>
+            <a:off x="-457200" y="320040"/>
+            <a:ext cx="4389120" cy="658368"/>
+          </a:xfrm>
+          <a:prstGeom prst="roundRect">
+            <a:avLst>
+              <a:gd name="adj" fmla="val 50000"/>
+            </a:avLst>
+          </a:prstGeom>
+          <a:solidFill>
+            <a:srgbClr val="FFFFFF"/>
+          </a:solidFill>
+          <a:ln w="12700">
+            <a:solidFill>
+              <a:srgbClr val="FFFFFF"/>
+            </a:solidFill>
+            <a:prstDash val="solid"/>
+          </a:ln>
+        </p:spPr>
+      </p:sp>
+      <p:sp>
+        <p:nvSpPr>
+          <p:cNvPr id="3" name="Text 0"/>
+          <p:cNvSpPr/>
+          <p:nvPr>
+            <p:ph idx="100" type="body" hasCustomPrompt="1"/>
+          </p:nvPr>
+        </p:nvSpPr>
+        <p:spPr>
+          <a:xfrm>
+            <a:off x="548640" y="320040"/>
+            <a:ext cx="3291840" cy="658368"/>
+          </a:xfrm>
+          <a:prstGeom prst="rect">
+            <a:avLst/>
+          </a:prstGeom>
+          <a:noFill/>
+          <a:ln/>
+        </p:spPr>
+        <p:txBody>
+          <a:bodyPr wrap="square" lIns="0" tIns="0" rIns="0" bIns="0" rtlCol="0" anchor="ctr"/>
+          <a:lstStyle/>
+          <a:p>
+            <a:pPr algn="l" indent="0" marL="0">
+              <a:buNone/>
+            </a:pPr>
+            <a:r>
+              <a:rPr lang="en-US" sz="2400" b="1" dirty="0">
+                <a:solidFill>
+                  <a:srgbClr val="0B1F5C"/>
+                </a:solidFill>
+              </a:rPr>
+              <a:t>El pedido</a:t>
+            </a:r>
+            <a:endParaRPr lang="en-US" sz="2400" dirty="0"/>
+          </a:p>
+        </p:txBody>
+      </p:sp>
+      <p:sp>
+        <p:nvSpPr>
+          <p:cNvPr id="4" name="Text 1"/>
+          <p:cNvSpPr/>
+          <p:nvPr>
+            <p:ph idx="102" type="body" hasCustomPrompt="1"/>
+          </p:nvPr>
+        </p:nvSpPr>
+        <p:spPr>
+          <a:xfrm>
+            <a:off x="548640" y="1143000"/>
+            <a:ext cx="11064240" cy="365760"/>
+          </a:xfrm>
+          <a:prstGeom prst="rect">
+            <a:avLst/>
+          </a:prstGeom>
+          <a:noFill/>
+          <a:ln/>
+        </p:spPr>
+        <p:txBody>
+          <a:bodyPr wrap="square" lIns="0" tIns="0" rIns="0" bIns="0" rtlCol="0" anchor="ctr"/>
+          <a:lstStyle/>
+          <a:p>
+            <a:pPr algn="l" indent="0" marL="0">
+              <a:buNone/>
+            </a:pPr>
+            <a:r>
+              <a:rPr lang="en-US" sz="1700" b="1" dirty="0">
+                <a:solidFill>
+                  <a:srgbClr val="4CC9F0"/>
+                </a:solidFill>
+              </a:rPr>
+              <a:t>¿Qué necesitamos de los Sharks?</a:t>
+            </a:r>
+            <a:endParaRPr lang="en-US" sz="1700" dirty="0"/>
+          </a:p>
+        </p:txBody>
+      </p:sp>
+      <p:sp>
+        <p:nvSpPr>
+          <p:cNvPr id="5" name="Text 1"/>
+          <p:cNvSpPr/>
+          <p:nvPr>
+            <p:ph idx="103" type="title" hasCustomPrompt="1"/>
+          </p:nvPr>
+        </p:nvSpPr>
+        <p:spPr>
+          <a:xfrm>
+            <a:off x="548640" y="1508760"/>
+            <a:ext cx="11064240" cy="777240"/>
+          </a:xfrm>
+          <a:prstGeom prst="rect">
+            <a:avLst/>
+          </a:prstGeom>
+          <a:noFill/>
+          <a:ln/>
+        </p:spPr>
+        <p:txBody>
+          <a:bodyPr wrap="square" lIns="0" tIns="0" rIns="0" bIns="0" rtlCol="0" anchor="t"/>
+          <a:lstStyle/>
+          <a:p>
+            <a:pPr algn="l" indent="0" marL="0">
+              <a:buNone/>
+            </a:pPr>
+            <a:r>
+              <a:rPr lang="en-US" sz="3000" b="1" dirty="0">
+                <a:solidFill>
+                  <a:schemeClr val="bg1"/>
+                </a:solidFill>
+              </a:rPr>
+              <a:t>Una inversión acotada para decidir con datos reales de Tigo</a:t>
+            </a:r>
+            <a:endParaRPr lang="en-US" sz="3000" dirty="0"/>
+          </a:p>
+        </p:txBody>
+      </p:sp>
+      <p:sp>
+        <p:nvSpPr>
+          <p:cNvPr id="6" name="k0"/>
+          <p:cNvSpPr/>
+          <p:nvPr/>
+        </p:nvSpPr>
+        <p:spPr>
+          <a:xfrm>
+            <a:off x="548640" y="2487168"/>
+            <a:ext cx="566928" cy="566928"/>
+          </a:xfrm>
+          <a:prstGeom prst="ellipse">
+            <a:avLst/>
+          </a:prstGeom>
+          <a:solidFill>
+            <a:srgbClr val="4CC9F0"/>
+          </a:solidFill>
+          <a:ln w="12700">
+            <a:solidFill>
+              <a:srgbClr val="4CC9F0"/>
+            </a:solidFill>
+            <a:prstDash val="solid"/>
+          </a:ln>
+        </p:spPr>
+      </p:sp>
+      <p:sp>
+        <p:nvSpPr>
+          <p:cNvPr id="7" name="k0-t"/>
+          <p:cNvSpPr txBox="1"/>
+          <p:nvPr/>
+        </p:nvSpPr>
+        <p:spPr>
+          <a:xfrm>
+            <a:off x="548640" y="2487168"/>
+            <a:ext cx="566928" cy="566928"/>
+          </a:xfrm>
+          <a:prstGeom prst="rect">
+            <a:avLst/>
+          </a:prstGeom>
+          <a:noFill/>
+          <a:ln/>
+        </p:spPr>
+        <p:txBody>
+          <a:bodyPr wrap="square" lIns="0" tIns="0" rIns="0" bIns="0" rtlCol="0" anchor="ctr"/>
+          <a:lstStyle/>
+          <a:p>
+            <a:pPr algn="ctr" indent="0" marL="0">
+              <a:buNone/>
+            </a:pPr>
+            <a:r>
+              <a:rPr lang="en-US" sz="1900" b="1" dirty="0">
+                <a:solidFill>
+                  <a:srgbClr val="0B1F5C"/>
+                </a:solidFill>
+              </a:rPr>
+              <a:t>1</a:t>
+            </a:r>
+            <a:endParaRPr lang="en-US" sz="1900" dirty="0"/>
+          </a:p>
+        </p:txBody>
+      </p:sp>
+      <p:sp>
+        <p:nvSpPr>
+          <p:cNvPr id="8" name="kt0"/>
+          <p:cNvSpPr txBox="1"/>
+          <p:nvPr/>
+        </p:nvSpPr>
+        <p:spPr>
+          <a:xfrm>
+            <a:off x="1325880" y="2441448"/>
+            <a:ext cx="5760720" cy="841248"/>
+          </a:xfrm>
+          <a:prstGeom prst="rect">
+            <a:avLst/>
+          </a:prstGeom>
+          <a:noFill/>
+          <a:ln/>
+        </p:spPr>
+        <p:txBody>
+          <a:bodyPr wrap="square" lIns="0" tIns="0" rIns="0" bIns="0" rtlCol="0" anchor="t"/>
+          <a:lstStyle/>
+          <a:p>
+            <a:pPr indent="0" marL="0">
+              <a:buNone/>
+            </a:pPr>
+            <a:r>
+              <a:rPr lang="en-US" sz="1900" b="1" dirty="0">
+                <a:solidFill>
+                  <a:srgbClr val="FFFFFF"/>
+                </a:solidFill>
+              </a:rPr>
+              <a:t>Datos</a:t>
+            </a:r>
+            <a:endParaRPr lang="en-US" sz="1600" dirty="0"/>
+          </a:p>
+          <a:p>
+            <a:pPr indent="0" marL="0">
+              <a:buNone/>
+            </a:pPr>
+            <a:r>
+              <a:rPr lang="en-US" sz="1400" dirty="0">
+                <a:solidFill>
+                  <a:srgbClr val="C9D5FB"/>
+                </a:solidFill>
+              </a:rPr>
+              <a:t>Archivos diarios del ACS, NOC, CRM, call center y órdenes de campo de San Pedro Sula</a:t>
+            </a:r>
+            <a:endParaRPr lang="en-US" sz="1600" dirty="0"/>
+          </a:p>
+        </p:txBody>
+      </p:sp>
+      <p:sp>
+        <p:nvSpPr>
+          <p:cNvPr id="9" name="k1"/>
+          <p:cNvSpPr/>
+          <p:nvPr/>
+        </p:nvSpPr>
+        <p:spPr>
+          <a:xfrm>
+            <a:off x="548640" y="3419856"/>
+            <a:ext cx="566928" cy="566928"/>
+          </a:xfrm>
+          <a:prstGeom prst="ellipse">
+            <a:avLst/>
+          </a:prstGeom>
+          <a:solidFill>
+            <a:srgbClr val="4CC9F0"/>
+          </a:solidFill>
+          <a:ln w="12700">
+            <a:solidFill>
+              <a:srgbClr val="4CC9F0"/>
+            </a:solidFill>
+            <a:prstDash val="solid"/>
+          </a:ln>
+        </p:spPr>
+      </p:sp>
+      <p:sp>
+        <p:nvSpPr>
+          <p:cNvPr id="10" name="k1-t"/>
+          <p:cNvSpPr txBox="1"/>
+          <p:nvPr/>
+        </p:nvSpPr>
+        <p:spPr>
+          <a:xfrm>
+            <a:off x="548640" y="3419856"/>
+            <a:ext cx="566928" cy="566928"/>
+          </a:xfrm>
+          <a:prstGeom prst="rect">
+            <a:avLst/>
+          </a:prstGeom>
+          <a:noFill/>
+          <a:ln/>
+        </p:spPr>
+        <p:txBody>
+          <a:bodyPr wrap="square" lIns="0" tIns="0" rIns="0" bIns="0" rtlCol="0" anchor="ctr"/>
+          <a:lstStyle/>
+          <a:p>
+            <a:pPr algn="ctr" indent="0" marL="0">
+              <a:buNone/>
+            </a:pPr>
+            <a:r>
+              <a:rPr lang="en-US" sz="1900" b="1" dirty="0">
+                <a:solidFill>
+                  <a:srgbClr val="0B1F5C"/>
+                </a:solidFill>
+              </a:rPr>
+              <a:t>2</a:t>
+            </a:r>
+            <a:endParaRPr lang="en-US" sz="1900" dirty="0"/>
+          </a:p>
+        </p:txBody>
+      </p:sp>
+      <p:sp>
+        <p:nvSpPr>
+          <p:cNvPr id="11" name="kt1"/>
+          <p:cNvSpPr txBox="1"/>
+          <p:nvPr/>
+        </p:nvSpPr>
+        <p:spPr>
+          <a:xfrm>
+            <a:off x="1325880" y="3374136"/>
+            <a:ext cx="5760720" cy="841248"/>
+          </a:xfrm>
+          <a:prstGeom prst="rect">
+            <a:avLst/>
+          </a:prstGeom>
+          <a:noFill/>
+          <a:ln/>
+        </p:spPr>
+        <p:txBody>
+          <a:bodyPr wrap="square" lIns="0" tIns="0" rIns="0" bIns="0" rtlCol="0" anchor="t"/>
+          <a:lstStyle/>
+          <a:p>
+            <a:pPr indent="0" marL="0">
+              <a:buNone/>
+            </a:pPr>
+            <a:r>
+              <a:rPr lang="en-US" sz="1900" b="1" dirty="0">
+                <a:solidFill>
+                  <a:srgbClr val="FFFFFF"/>
+                </a:solidFill>
+              </a:rPr>
+              <a:t>Equipo</a:t>
+            </a:r>
+            <a:endParaRPr lang="en-US" sz="1600" dirty="0"/>
+          </a:p>
+          <a:p>
+            <a:pPr indent="0" marL="0">
+              <a:buNone/>
+            </a:pPr>
+            <a:r>
+              <a:rPr lang="en-US" sz="1400" dirty="0">
+                <a:solidFill>
+                  <a:srgbClr val="C9D5FB"/>
+                </a:solidFill>
+              </a:rPr>
+              <a:t>Un patrocinador, enlaces de NOC e ingeniería de acceso, soporte N2 y un analista al 50 %</a:t>
+            </a:r>
+            <a:endParaRPr lang="en-US" sz="1600" dirty="0"/>
+          </a:p>
+        </p:txBody>
+      </p:sp>
+      <p:sp>
+        <p:nvSpPr>
+          <p:cNvPr id="12" name="k2"/>
+          <p:cNvSpPr/>
+          <p:nvPr/>
+        </p:nvSpPr>
+        <p:spPr>
+          <a:xfrm>
+            <a:off x="548640" y="4352544"/>
+            <a:ext cx="566928" cy="566928"/>
+          </a:xfrm>
+          <a:prstGeom prst="ellipse">
+            <a:avLst/>
+          </a:prstGeom>
+          <a:solidFill>
+            <a:srgbClr val="4CC9F0"/>
+          </a:solidFill>
+          <a:ln w="12700">
+            <a:solidFill>
+              <a:srgbClr val="4CC9F0"/>
+            </a:solidFill>
+            <a:prstDash val="solid"/>
+          </a:ln>
+        </p:spPr>
+      </p:sp>
+      <p:sp>
+        <p:nvSpPr>
+          <p:cNvPr id="13" name="k2-t"/>
+          <p:cNvSpPr txBox="1"/>
+          <p:nvPr/>
+        </p:nvSpPr>
+        <p:spPr>
+          <a:xfrm>
+            <a:off x="548640" y="4352544"/>
+            <a:ext cx="566928" cy="566928"/>
+          </a:xfrm>
+          <a:prstGeom prst="rect">
+            <a:avLst/>
+          </a:prstGeom>
+          <a:noFill/>
+          <a:ln/>
+        </p:spPr>
+        <p:txBody>
+          <a:bodyPr wrap="square" lIns="0" tIns="0" rIns="0" bIns="0" rtlCol="0" anchor="ctr"/>
+          <a:lstStyle/>
+          <a:p>
+            <a:pPr algn="ctr" indent="0" marL="0">
+              <a:buNone/>
+            </a:pPr>
+            <a:r>
+              <a:rPr lang="en-US" sz="1900" b="1" dirty="0">
+                <a:solidFill>
+                  <a:srgbClr val="0B1F5C"/>
+                </a:solidFill>
+              </a:rPr>
+              <a:t>3</a:t>
+            </a:r>
+            <a:endParaRPr lang="en-US" sz="1900" dirty="0"/>
+          </a:p>
+        </p:txBody>
+      </p:sp>
+      <p:sp>
+        <p:nvSpPr>
+          <p:cNvPr id="14" name="kt2"/>
+          <p:cNvSpPr txBox="1"/>
+          <p:nvPr/>
+        </p:nvSpPr>
+        <p:spPr>
+          <a:xfrm>
+            <a:off x="1325880" y="4306824"/>
+            <a:ext cx="5760720" cy="841248"/>
+          </a:xfrm>
+          <a:prstGeom prst="rect">
+            <a:avLst/>
+          </a:prstGeom>
+          <a:noFill/>
+          <a:ln/>
+        </p:spPr>
+        <p:txBody>
+          <a:bodyPr wrap="square" lIns="0" tIns="0" rIns="0" bIns="0" rtlCol="0" anchor="t"/>
+          <a:lstStyle/>
+          <a:p>
+            <a:pPr indent="0" marL="0">
+              <a:buNone/>
+            </a:pPr>
+            <a:r>
+              <a:rPr lang="en-US" sz="1900" b="1" dirty="0">
+                <a:solidFill>
+                  <a:srgbClr val="FFFFFF"/>
+                </a:solidFill>
+              </a:rPr>
+              <a:t>Canal y cumplimiento</a:t>
+            </a:r>
+            <a:endParaRPr lang="en-US" sz="1600" dirty="0"/>
+          </a:p>
+          <a:p>
+            <a:pPr indent="0" marL="0">
+              <a:buNone/>
+            </a:pPr>
+            <a:r>
+              <a:rPr lang="en-US" sz="1400" dirty="0">
+                <a:solidFill>
+                  <a:srgbClr val="C9D5FB"/>
+                </a:solidFill>
+              </a:rPr>
+              <a:t>Plantillas de WhatsApp Business y visto bueno de Legal y Seguridad</a:t>
+            </a:r>
+            <a:endParaRPr lang="en-US" sz="1600" dirty="0"/>
+          </a:p>
+        </p:txBody>
+      </p:sp>
+      <p:sp>
+        <p:nvSpPr>
+          <p:cNvPr id="15" name="k3"/>
+          <p:cNvSpPr/>
+          <p:nvPr/>
+        </p:nvSpPr>
+        <p:spPr>
+          <a:xfrm>
+            <a:off x="548640" y="5285232"/>
+            <a:ext cx="566928" cy="566928"/>
+          </a:xfrm>
+          <a:prstGeom prst="ellipse">
+            <a:avLst/>
+          </a:prstGeom>
+          <a:solidFill>
+            <a:srgbClr val="4CC9F0"/>
+          </a:solidFill>
+          <a:ln w="12700">
+            <a:solidFill>
+              <a:srgbClr val="4CC9F0"/>
+            </a:solidFill>
+            <a:prstDash val="solid"/>
+          </a:ln>
+        </p:spPr>
+      </p:sp>
+      <p:sp>
+        <p:nvSpPr>
+          <p:cNvPr id="16" name="k3-t"/>
+          <p:cNvSpPr txBox="1"/>
+          <p:nvPr/>
+        </p:nvSpPr>
+        <p:spPr>
+          <a:xfrm>
+            <a:off x="548640" y="5285232"/>
+            <a:ext cx="566928" cy="566928"/>
+          </a:xfrm>
+          <a:prstGeom prst="rect">
+            <a:avLst/>
+          </a:prstGeom>
+          <a:noFill/>
+          <a:ln/>
+        </p:spPr>
+        <p:txBody>
+          <a:bodyPr wrap="square" lIns="0" tIns="0" rIns="0" bIns="0" rtlCol="0" anchor="ctr"/>
+          <a:lstStyle/>
+          <a:p>
+            <a:pPr algn="ctr" indent="0" marL="0">
+              <a:buNone/>
+            </a:pPr>
+            <a:r>
+              <a:rPr lang="en-US" sz="1900" b="1" dirty="0">
+                <a:solidFill>
+                  <a:srgbClr val="0B1F5C"/>
+                </a:solidFill>
+              </a:rPr>
+              <a:t>4</a:t>
+            </a:r>
+            <a:endParaRPr lang="en-US" sz="1900" dirty="0"/>
+          </a:p>
+        </p:txBody>
+      </p:sp>
+      <p:sp>
+        <p:nvSpPr>
+          <p:cNvPr id="17" name="kt3"/>
+          <p:cNvSpPr txBox="1"/>
+          <p:nvPr/>
+        </p:nvSpPr>
+        <p:spPr>
+          <a:xfrm>
+            <a:off x="1325880" y="5239512"/>
+            <a:ext cx="5760720" cy="841248"/>
+          </a:xfrm>
+          <a:prstGeom prst="rect">
+            <a:avLst/>
+          </a:prstGeom>
+          <a:noFill/>
+          <a:ln/>
+        </p:spPr>
+        <p:txBody>
+          <a:bodyPr wrap="square" lIns="0" tIns="0" rIns="0" bIns="0" rtlCol="0" anchor="t"/>
+          <a:lstStyle/>
+          <a:p>
+            <a:pPr indent="0" marL="0">
+              <a:buNone/>
+            </a:pPr>
+            <a:r>
+              <a:rPr lang="en-US" sz="1900" b="1" dirty="0">
+                <a:solidFill>
+                  <a:srgbClr val="FFFFFF"/>
+                </a:solidFill>
+              </a:rPr>
+              <a:t>Decisión</a:t>
+            </a:r>
+            <a:endParaRPr lang="en-US" sz="1600" dirty="0"/>
+          </a:p>
+          <a:p>
+            <a:pPr indent="0" marL="0">
+              <a:buNone/>
+            </a:pPr>
+            <a:r>
+              <a:rPr lang="en-US" sz="1400" dirty="0">
+                <a:solidFill>
+                  <a:srgbClr val="C9D5FB"/>
+                </a:solidFill>
+              </a:rPr>
+              <a:t>En la semana 12, con números reales, ustedes deciden GO o NO-GO por frente</a:t>
+            </a:r>
+            <a:endParaRPr lang="en-US" sz="1600" dirty="0"/>
+          </a:p>
+        </p:txBody>
+      </p:sp>
+      <p:sp>
+        <p:nvSpPr>
+          <p:cNvPr id="18" name="inv"/>
+          <p:cNvSpPr/>
+          <p:nvPr/>
+        </p:nvSpPr>
+        <p:spPr>
+          <a:xfrm>
+            <a:off x="7452360" y="2468880"/>
+            <a:ext cx="4187952" cy="3703320"/>
+          </a:xfrm>
+          <a:prstGeom prst="roundRect">
+            <a:avLst>
+              <a:gd name="adj" fmla="val 3457"/>
+            </a:avLst>
+          </a:prstGeom>
+          <a:solidFill>
+            <a:srgbClr val="FFC629"/>
+          </a:solidFill>
+          <a:ln w="12700">
+            <a:solidFill>
+              <a:srgbClr val="FFC629"/>
+            </a:solidFill>
+            <a:prstDash val="solid"/>
+          </a:ln>
+          <a:effectLst>
+            <a:outerShdw sx="100000" sy="100000" kx="0" ky="0" algn="bl" rotWithShape="0" blurRad="101600" dist="38100" dir="5400000">
+              <a:srgbClr val="000A33">
+                <a:alpha val="25000"/>
+              </a:srgbClr>
+            </a:outerShdw>
+          </a:effectLst>
+        </p:spPr>
+      </p:sp>
+      <p:sp>
+        <p:nvSpPr>
+          <p:cNvPr id="19" name="inv-t"/>
+          <p:cNvSpPr txBox="1"/>
+          <p:nvPr/>
+        </p:nvSpPr>
+        <p:spPr>
+          <a:xfrm>
+            <a:off x="7772400" y="2697480"/>
+            <a:ext cx="3566160" cy="411480"/>
+          </a:xfrm>
+          <a:prstGeom prst="rect">
+            <a:avLst/>
+          </a:prstGeom>
+          <a:noFill/>
+          <a:ln/>
+        </p:spPr>
+        <p:txBody>
+          <a:bodyPr wrap="square" lIns="0" tIns="0" rIns="0" bIns="0" rtlCol="0" anchor="ctr"/>
+          <a:lstStyle/>
+          <a:p>
+            <a:pPr indent="0" marL="0">
+              <a:buNone/>
+            </a:pPr>
+            <a:r>
+              <a:rPr lang="en-US" sz="1900" b="1" dirty="0">
+                <a:solidFill>
+                  <a:srgbClr val="0B1F5C"/>
+                </a:solidFill>
+              </a:rPr>
+              <a:t>Inversión del piloto</a:t>
+            </a:r>
+            <a:endParaRPr lang="en-US" sz="1900" dirty="0"/>
+          </a:p>
+        </p:txBody>
+      </p:sp>
+      <p:sp>
+        <p:nvSpPr>
+          <p:cNvPr id="20" name="inv-v"/>
+          <p:cNvSpPr txBox="1"/>
+          <p:nvPr/>
+        </p:nvSpPr>
+        <p:spPr>
+          <a:xfrm>
+            <a:off x="7772400" y="3108960"/>
+            <a:ext cx="3566160" cy="914400"/>
+          </a:xfrm>
+          <a:prstGeom prst="rect">
+            <a:avLst/>
+          </a:prstGeom>
+          <a:noFill/>
+          <a:ln/>
+        </p:spPr>
+        <p:txBody>
+          <a:bodyPr wrap="square" lIns="0" tIns="0" rIns="0" bIns="0" rtlCol="0" anchor="ctr"/>
+          <a:lstStyle/>
+          <a:p>
+            <a:pPr indent="0" marL="0">
+              <a:buNone/>
+            </a:pPr>
+            <a:r>
+              <a:rPr lang="en-US" sz="5400" b="1" dirty="0">
+                <a:solidFill>
+                  <a:srgbClr val="0B1F5C"/>
+                </a:solidFill>
+              </a:rPr>
+              <a:t>L 770 mil</a:t>
+            </a:r>
+            <a:endParaRPr lang="en-US" sz="5400" dirty="0"/>
+          </a:p>
+        </p:txBody>
+      </p:sp>
+      <p:sp>
+        <p:nvSpPr>
+          <p:cNvPr id="21" name="inv-r"/>
+          <p:cNvSpPr txBox="1"/>
+          <p:nvPr/>
+        </p:nvSpPr>
+        <p:spPr>
+          <a:xfrm>
+            <a:off x="7772400" y="4023360"/>
+            <a:ext cx="3566160" cy="411480"/>
+          </a:xfrm>
+          <a:prstGeom prst="rect">
+            <a:avLst/>
+          </a:prstGeom>
+          <a:noFill/>
+          <a:ln/>
+        </p:spPr>
+        <p:txBody>
+          <a:bodyPr wrap="square" lIns="0" tIns="0" rIns="0" bIns="0" rtlCol="0" anchor="ctr"/>
+          <a:lstStyle/>
+          <a:p>
+            <a:pPr indent="0" marL="0">
+              <a:buNone/>
+            </a:pPr>
+            <a:r>
+              <a:rPr lang="en-US" sz="1600" b="1" dirty="0">
+                <a:solidFill>
+                  <a:srgbClr val="0B1F5C"/>
+                </a:solidFill>
+              </a:rPr>
+              <a:t>≈ US$ 28 mil · 12 semanas · 2 frentes</a:t>
+            </a:r>
+            <a:endParaRPr lang="en-US" sz="1600" dirty="0"/>
+          </a:p>
+        </p:txBody>
+      </p:sp>
+      <p:sp>
+        <p:nvSpPr>
+          <p:cNvPr id="22" name="inv-n"/>
+          <p:cNvSpPr txBox="1"/>
+          <p:nvPr/>
+        </p:nvSpPr>
+        <p:spPr>
+          <a:xfrm>
+            <a:off x="7772400" y="4617720"/>
+            <a:ext cx="3566160" cy="1280160"/>
+          </a:xfrm>
+          <a:prstGeom prst="rect">
+            <a:avLst/>
+          </a:prstGeom>
+          <a:noFill/>
+          <a:ln/>
+        </p:spPr>
+        <p:txBody>
+          <a:bodyPr wrap="square" lIns="0" tIns="0" rIns="0" bIns="0" rtlCol="0" anchor="t"/>
+          <a:lstStyle/>
+          <a:p>
+            <a:pPr indent="0" marL="0">
+              <a:buNone/>
+            </a:pPr>
+            <a:r>
+              <a:rPr lang="en-US" sz="1500" dirty="0">
+                <a:solidFill>
+                  <a:srgbClr val="0B1F5C"/>
+                </a:solidFill>
+              </a:rPr>
+              <a:t>Si es GO, el escenario base deja L 4.3 M netos en el año 1 a nivel nacional.</a:t>
+            </a:r>
+            <a:endParaRPr lang="en-US" sz="1500" dirty="0"/>
+          </a:p>
+        </p:txBody>
+      </p:sp>
+      <p:sp>
+        <p:nvSpPr>
+          <p:cNvPr id="25" name="Slide Number Placeholder 0"/>
+          <p:cNvSpPr>
+            <a:spLocks noGrp="1"/>
+          </p:cNvSpPr>
+          <p:nvPr>
+            <p:ph type="sldNum" sz="quarter" idx="4294967295"/>
+          </p:nvPr>
+        </p:nvSpPr>
+        <p:spPr>
+          <a:xfrm>
+            <a:off x="11155680" y="6419088"/>
+            <a:ext cx="457200" cy="274320"/>
+          </a:xfrm>
+          <a:prstGeom prst="rect">
+            <a:avLst/>
+          </a:prstGeom>
+          <a:extLst>
+            <a:ext uri="{C572A759-6A51-4108-AA02-DFA0A04FC94B}">
+              <ma14:wrappingTextBoxFlag xmlns:ma14="http://schemas.microsoft.com/office/mac/drawingml/2011/main" val="0"/>
+            </a:ext>
+          </a:extLst>
+        </p:spPr>
+        <p:txBody>
+          <a:bodyPr/>
+          <a:lstStyle>
+            <a:lvl1pPr>
+              <a:defRPr sz="1000">
+                <a:solidFill>
+                  <a:srgbClr val="9FB2F0"/>
+                </a:solidFill>
+              </a:defRPr>
+            </a:lvl1pPr>
+          </a:lstStyle>
+          <a:p>
+            <a:pPr algn="r"/>
+            <a:fld id="{F7021451-1387-4CA6-816F-3879F97B5CBC}" type="slidenum">
+              <a:rPr b="0" lang="en-US"/>
+              <a:t>12</a:t>
+            </a:fld>
+            <a:endParaRPr lang="en-US"/>
+          </a:p>
+        </p:txBody>
+      </p:sp>
+    </p:spTree>
+  </p:cSld>
+  <p:clrMapOvr>
+    <a:masterClrMapping/>
+  </p:clrMapOvr>
+</p:sld>
+</file>
+
+<file path=ppt/slides/slide13.xml><?xml version="1.0" encoding="utf-8"?>
+<p:sld xmlns:a="http://schemas.openxmlformats.org/drawingml/2006/main" xmlns:r="http://schemas.openxmlformats.org/officeDocument/2006/relationships" xmlns:p="http://schemas.openxmlformats.org/presentationml/2006/main">
+  <p:cSld name="Slide 13">
+    <p:spTree>
+      <p:nvGrpSpPr>
+        <p:cNvPr id="1" name=""/>
+        <p:cNvGrpSpPr/>
+        <p:nvPr/>
+      </p:nvGrpSpPr>
+      <p:grpSpPr>
+        <a:xfrm>
+          <a:off x="0" y="0"/>
+          <a:ext cx="0" cy="0"/>
+          <a:chOff x="0" y="0"/>
+          <a:chExt cx="0" cy="0"/>
+        </a:xfrm>
+      </p:grpSpPr>
+      <p:sp>
+        <p:nvSpPr>
           <p:cNvPr id="2" name="Text 0"/>
           <p:cNvSpPr/>
           <p:nvPr>
@@ -9344,7 +9934,7 @@
                   <a:srgbClr val="FFFFFF"/>
                 </a:solidFill>
               </a:rPr>
-              <a:t>cuando cae un sitio, aviso por WhatsApp antes de que llamen.</a:t>
+              <a:t>cuando cae un sitio, aviso por WhatsApp o SMS antes de que llamen.</a:t>
             </a:r>
             <a:endParaRPr lang="en-US" sz="1500" dirty="0"/>
           </a:p>
